--- a/Part6_SummaryStatistics/Part6_SummaryStats.pptx
+++ b/Part6_SummaryStatistics/Part6_SummaryStats.pptx
@@ -5,7 +5,7 @@
     <p:sldMasterId id="2147483648" r:id="rId1"/>
   </p:sldMasterIdLst>
   <p:notesMasterIdLst>
-    <p:notesMasterId r:id="rId21"/>
+    <p:notesMasterId r:id="rId22"/>
   </p:notesMasterIdLst>
   <p:sldIdLst>
     <p:sldId id="256" r:id="rId2"/>
@@ -14,19 +14,20 @@
     <p:sldId id="259" r:id="rId5"/>
     <p:sldId id="260" r:id="rId6"/>
     <p:sldId id="261" r:id="rId7"/>
-    <p:sldId id="262" r:id="rId8"/>
-    <p:sldId id="263" r:id="rId9"/>
-    <p:sldId id="264" r:id="rId10"/>
-    <p:sldId id="265" r:id="rId11"/>
-    <p:sldId id="266" r:id="rId12"/>
-    <p:sldId id="267" r:id="rId13"/>
-    <p:sldId id="463" r:id="rId14"/>
-    <p:sldId id="280" r:id="rId15"/>
-    <p:sldId id="291" r:id="rId16"/>
-    <p:sldId id="464" r:id="rId17"/>
-    <p:sldId id="465" r:id="rId18"/>
-    <p:sldId id="466" r:id="rId19"/>
-    <p:sldId id="467" r:id="rId20"/>
+    <p:sldId id="468" r:id="rId8"/>
+    <p:sldId id="262" r:id="rId9"/>
+    <p:sldId id="263" r:id="rId10"/>
+    <p:sldId id="264" r:id="rId11"/>
+    <p:sldId id="265" r:id="rId12"/>
+    <p:sldId id="266" r:id="rId13"/>
+    <p:sldId id="267" r:id="rId14"/>
+    <p:sldId id="463" r:id="rId15"/>
+    <p:sldId id="280" r:id="rId16"/>
+    <p:sldId id="291" r:id="rId17"/>
+    <p:sldId id="464" r:id="rId18"/>
+    <p:sldId id="465" r:id="rId19"/>
+    <p:sldId id="466" r:id="rId20"/>
+    <p:sldId id="467" r:id="rId21"/>
   </p:sldIdLst>
   <p:sldSz cx="12192000" cy="6858000"/>
   <p:notesSz cx="6858000" cy="9144000"/>
@@ -215,7 +216,7 @@
           <a:p>
             <a:fld id="{B5EDAD82-4A91-4FCD-8377-229631DED7F6}" type="datetimeFigureOut">
               <a:rPr lang="en-US" smtClean="0"/>
-              <a:t>7/21/2026</a:t>
+              <a:t>7/22/2026</a:t>
             </a:fld>
             <a:endParaRPr lang="en-US"/>
           </a:p>
@@ -574,6 +575,114 @@
         <p:cNvPr id="1" name="">
           <a:extLst>
             <a:ext uri="{FF2B5EF4-FFF2-40B4-BE49-F238E27FC236}">
+              <a16:creationId xmlns:a16="http://schemas.microsoft.com/office/drawing/2014/main" id="{514B7D9F-874C-C279-1C94-F95AB9F3F8EE}"/>
+            </a:ext>
+          </a:extLst>
+        </p:cNvPr>
+        <p:cNvGrpSpPr/>
+        <p:nvPr/>
+      </p:nvGrpSpPr>
+      <p:grpSpPr>
+        <a:xfrm>
+          <a:off x="0" y="0"/>
+          <a:ext cx="0" cy="0"/>
+          <a:chOff x="0" y="0"/>
+          <a:chExt cx="0" cy="0"/>
+        </a:xfrm>
+      </p:grpSpPr>
+      <p:sp>
+        <p:nvSpPr>
+          <p:cNvPr id="2" name="Slide Image Placeholder 1">
+            <a:extLst>
+              <a:ext uri="{FF2B5EF4-FFF2-40B4-BE49-F238E27FC236}">
+                <a16:creationId xmlns:a16="http://schemas.microsoft.com/office/drawing/2014/main" id="{59C36AA4-B4F6-4261-CC64-C67A0DEFC6C0}"/>
+              </a:ext>
+            </a:extLst>
+          </p:cNvPr>
+          <p:cNvSpPr>
+            <a:spLocks noGrp="1" noRot="1" noChangeAspect="1"/>
+          </p:cNvSpPr>
+          <p:nvPr>
+            <p:ph type="sldImg"/>
+          </p:nvPr>
+        </p:nvSpPr>
+        <p:spPr/>
+      </p:sp>
+      <p:sp>
+        <p:nvSpPr>
+          <p:cNvPr id="3" name="Notes Placeholder 2">
+            <a:extLst>
+              <a:ext uri="{FF2B5EF4-FFF2-40B4-BE49-F238E27FC236}">
+                <a16:creationId xmlns:a16="http://schemas.microsoft.com/office/drawing/2014/main" id="{149D8D07-3C13-9014-32A6-D9CE09366172}"/>
+              </a:ext>
+            </a:extLst>
+          </p:cNvPr>
+          <p:cNvSpPr>
+            <a:spLocks noGrp="1"/>
+          </p:cNvSpPr>
+          <p:nvPr>
+            <p:ph type="body" idx="1"/>
+          </p:nvPr>
+        </p:nvSpPr>
+        <p:spPr/>
+        <p:txBody>
+          <a:bodyPr/>
+          <a:lstStyle/>
+          <a:p>
+            <a:endParaRPr lang="en-US" dirty="0"/>
+          </a:p>
+        </p:txBody>
+      </p:sp>
+      <p:sp>
+        <p:nvSpPr>
+          <p:cNvPr id="4" name="Slide Number Placeholder 3">
+            <a:extLst>
+              <a:ext uri="{FF2B5EF4-FFF2-40B4-BE49-F238E27FC236}">
+                <a16:creationId xmlns:a16="http://schemas.microsoft.com/office/drawing/2014/main" id="{B371BABC-9D62-F188-E1F5-A9B2225FA6DF}"/>
+              </a:ext>
+            </a:extLst>
+          </p:cNvPr>
+          <p:cNvSpPr>
+            <a:spLocks noGrp="1"/>
+          </p:cNvSpPr>
+          <p:nvPr>
+            <p:ph type="sldNum" sz="quarter" idx="5"/>
+          </p:nvPr>
+        </p:nvSpPr>
+        <p:spPr/>
+        <p:txBody>
+          <a:bodyPr/>
+          <a:lstStyle/>
+          <a:p>
+            <a:fld id="{11BBE17A-011E-42C8-B886-9AAF15091A83}" type="slidenum">
+              <a:rPr lang="en-US" smtClean="0"/>
+              <a:t>18</a:t>
+            </a:fld>
+            <a:endParaRPr lang="en-US"/>
+          </a:p>
+        </p:txBody>
+      </p:sp>
+    </p:spTree>
+    <p:extLst>
+      <p:ext uri="{BB962C8B-B14F-4D97-AF65-F5344CB8AC3E}">
+        <p14:creationId xmlns:p14="http://schemas.microsoft.com/office/powerpoint/2010/main" val="3328442210"/>
+      </p:ext>
+    </p:extLst>
+  </p:cSld>
+  <p:clrMapOvr>
+    <a:masterClrMapping/>
+  </p:clrMapOvr>
+</p:notes>
+</file>
+
+<file path=ppt/notesSlides/notesSlide11.xml><?xml version="1.0" encoding="utf-8"?>
+<p:notes xmlns:a="http://schemas.openxmlformats.org/drawingml/2006/main" xmlns:r="http://schemas.openxmlformats.org/officeDocument/2006/relationships" xmlns:p="http://schemas.openxmlformats.org/presentationml/2006/main">
+  <p:cSld>
+    <p:spTree>
+      <p:nvGrpSpPr>
+        <p:cNvPr id="1" name="">
+          <a:extLst>
+            <a:ext uri="{FF2B5EF4-FFF2-40B4-BE49-F238E27FC236}">
               <a16:creationId xmlns:a16="http://schemas.microsoft.com/office/drawing/2014/main" id="{48E4F663-2238-A012-E276-D29997F4CECB}"/>
             </a:ext>
           </a:extLst>
@@ -655,7 +764,7 @@
           <a:p>
             <a:fld id="{11BBE17A-011E-42C8-B886-9AAF15091A83}" type="slidenum">
               <a:rPr lang="en-US" smtClean="0"/>
-              <a:t>18</a:t>
+              <a:t>19</a:t>
             </a:fld>
             <a:endParaRPr lang="en-US"/>
           </a:p>
@@ -674,7 +783,7 @@
 </p:notes>
 </file>
 
-<file path=ppt/notesSlides/notesSlide11.xml><?xml version="1.0" encoding="utf-8"?>
+<file path=ppt/notesSlides/notesSlide12.xml><?xml version="1.0" encoding="utf-8"?>
 <p:notes xmlns:a="http://schemas.openxmlformats.org/drawingml/2006/main" xmlns:r="http://schemas.openxmlformats.org/officeDocument/2006/relationships" xmlns:p="http://schemas.openxmlformats.org/presentationml/2006/main">
   <p:cSld>
     <p:spTree>
@@ -763,7 +872,7 @@
           <a:p>
             <a:fld id="{11BBE17A-011E-42C8-B886-9AAF15091A83}" type="slidenum">
               <a:rPr lang="en-US" smtClean="0"/>
-              <a:t>19</a:t>
+              <a:t>20</a:t>
             </a:fld>
             <a:endParaRPr lang="en-US"/>
           </a:p>
@@ -783,6 +892,114 @@
 </file>
 
 <file path=ppt/notesSlides/notesSlide2.xml><?xml version="1.0" encoding="utf-8"?>
+<p:notes xmlns:a="http://schemas.openxmlformats.org/drawingml/2006/main" xmlns:r="http://schemas.openxmlformats.org/officeDocument/2006/relationships" xmlns:p="http://schemas.openxmlformats.org/presentationml/2006/main">
+  <p:cSld>
+    <p:spTree>
+      <p:nvGrpSpPr>
+        <p:cNvPr id="1" name="">
+          <a:extLst>
+            <a:ext uri="{FF2B5EF4-FFF2-40B4-BE49-F238E27FC236}">
+              <a16:creationId xmlns:a16="http://schemas.microsoft.com/office/drawing/2014/main" id="{DCA7A60B-6EEC-1BBD-692B-9A434598F484}"/>
+            </a:ext>
+          </a:extLst>
+        </p:cNvPr>
+        <p:cNvGrpSpPr/>
+        <p:nvPr/>
+      </p:nvGrpSpPr>
+      <p:grpSpPr>
+        <a:xfrm>
+          <a:off x="0" y="0"/>
+          <a:ext cx="0" cy="0"/>
+          <a:chOff x="0" y="0"/>
+          <a:chExt cx="0" cy="0"/>
+        </a:xfrm>
+      </p:grpSpPr>
+      <p:sp>
+        <p:nvSpPr>
+          <p:cNvPr id="2" name="Slide Image Placeholder 1">
+            <a:extLst>
+              <a:ext uri="{FF2B5EF4-FFF2-40B4-BE49-F238E27FC236}">
+                <a16:creationId xmlns:a16="http://schemas.microsoft.com/office/drawing/2014/main" id="{5EB0671B-F75A-76C3-61BB-0E337C70831E}"/>
+              </a:ext>
+            </a:extLst>
+          </p:cNvPr>
+          <p:cNvSpPr>
+            <a:spLocks noGrp="1" noRot="1" noChangeAspect="1"/>
+          </p:cNvSpPr>
+          <p:nvPr>
+            <p:ph type="sldImg"/>
+          </p:nvPr>
+        </p:nvSpPr>
+        <p:spPr/>
+      </p:sp>
+      <p:sp>
+        <p:nvSpPr>
+          <p:cNvPr id="3" name="Notes Placeholder 2">
+            <a:extLst>
+              <a:ext uri="{FF2B5EF4-FFF2-40B4-BE49-F238E27FC236}">
+                <a16:creationId xmlns:a16="http://schemas.microsoft.com/office/drawing/2014/main" id="{091B9B29-B299-CBCA-43FC-357713E97E5B}"/>
+              </a:ext>
+            </a:extLst>
+          </p:cNvPr>
+          <p:cNvSpPr>
+            <a:spLocks noGrp="1"/>
+          </p:cNvSpPr>
+          <p:nvPr>
+            <p:ph type="body" idx="1"/>
+          </p:nvPr>
+        </p:nvSpPr>
+        <p:spPr/>
+        <p:txBody>
+          <a:bodyPr/>
+          <a:lstStyle/>
+          <a:p>
+            <a:endParaRPr lang="en-US" dirty="0"/>
+          </a:p>
+        </p:txBody>
+      </p:sp>
+      <p:sp>
+        <p:nvSpPr>
+          <p:cNvPr id="4" name="Slide Number Placeholder 3">
+            <a:extLst>
+              <a:ext uri="{FF2B5EF4-FFF2-40B4-BE49-F238E27FC236}">
+                <a16:creationId xmlns:a16="http://schemas.microsoft.com/office/drawing/2014/main" id="{8902F450-F961-C52C-B987-0CA643800F0E}"/>
+              </a:ext>
+            </a:extLst>
+          </p:cNvPr>
+          <p:cNvSpPr>
+            <a:spLocks noGrp="1"/>
+          </p:cNvSpPr>
+          <p:nvPr>
+            <p:ph type="sldNum" sz="quarter" idx="5"/>
+          </p:nvPr>
+        </p:nvSpPr>
+        <p:spPr/>
+        <p:txBody>
+          <a:bodyPr/>
+          <a:lstStyle/>
+          <a:p>
+            <a:fld id="{11BBE17A-011E-42C8-B886-9AAF15091A83}" type="slidenum">
+              <a:rPr lang="en-US" smtClean="0"/>
+              <a:t>7</a:t>
+            </a:fld>
+            <a:endParaRPr lang="en-US"/>
+          </a:p>
+        </p:txBody>
+      </p:sp>
+    </p:spTree>
+    <p:extLst>
+      <p:ext uri="{BB962C8B-B14F-4D97-AF65-F5344CB8AC3E}">
+        <p14:creationId xmlns:p14="http://schemas.microsoft.com/office/powerpoint/2010/main" val="1837559486"/>
+      </p:ext>
+    </p:extLst>
+  </p:cSld>
+  <p:clrMapOvr>
+    <a:masterClrMapping/>
+  </p:clrMapOvr>
+</p:notes>
+</file>
+
+<file path=ppt/notesSlides/notesSlide3.xml><?xml version="1.0" encoding="utf-8"?>
 <p:notes xmlns:a="http://schemas.openxmlformats.org/drawingml/2006/main" xmlns:r="http://schemas.openxmlformats.org/officeDocument/2006/relationships" xmlns:p="http://schemas.openxmlformats.org/presentationml/2006/main">
   <p:cSld>
     <p:spTree>
@@ -871,7 +1088,7 @@
           <a:p>
             <a:fld id="{11BBE17A-011E-42C8-B886-9AAF15091A83}" type="slidenum">
               <a:rPr lang="en-US" smtClean="0"/>
-              <a:t>7</a:t>
+              <a:t>8</a:t>
             </a:fld>
             <a:endParaRPr lang="en-US"/>
           </a:p>
@@ -890,7 +1107,7 @@
 </p:notes>
 </file>
 
-<file path=ppt/notesSlides/notesSlide3.xml><?xml version="1.0" encoding="utf-8"?>
+<file path=ppt/notesSlides/notesSlide4.xml><?xml version="1.0" encoding="utf-8"?>
 <p:notes xmlns:a="http://schemas.openxmlformats.org/drawingml/2006/main" xmlns:r="http://schemas.openxmlformats.org/officeDocument/2006/relationships" xmlns:p="http://schemas.openxmlformats.org/presentationml/2006/main">
   <p:cSld>
     <p:spTree>
@@ -979,7 +1196,7 @@
           <a:p>
             <a:fld id="{11BBE17A-011E-42C8-B886-9AAF15091A83}" type="slidenum">
               <a:rPr lang="en-US" smtClean="0"/>
-              <a:t>8</a:t>
+              <a:t>9</a:t>
             </a:fld>
             <a:endParaRPr lang="en-US"/>
           </a:p>
@@ -998,7 +1215,7 @@
 </p:notes>
 </file>
 
-<file path=ppt/notesSlides/notesSlide4.xml><?xml version="1.0" encoding="utf-8"?>
+<file path=ppt/notesSlides/notesSlide5.xml><?xml version="1.0" encoding="utf-8"?>
 <p:notes xmlns:a="http://schemas.openxmlformats.org/drawingml/2006/main" xmlns:r="http://schemas.openxmlformats.org/officeDocument/2006/relationships" xmlns:p="http://schemas.openxmlformats.org/presentationml/2006/main">
   <p:cSld>
     <p:spTree>
@@ -1087,7 +1304,7 @@
           <a:p>
             <a:fld id="{11BBE17A-011E-42C8-B886-9AAF15091A83}" type="slidenum">
               <a:rPr lang="en-US" smtClean="0"/>
-              <a:t>9</a:t>
+              <a:t>10</a:t>
             </a:fld>
             <a:endParaRPr lang="en-US"/>
           </a:p>
@@ -1106,7 +1323,7 @@
 </p:notes>
 </file>
 
-<file path=ppt/notesSlides/notesSlide5.xml><?xml version="1.0" encoding="utf-8"?>
+<file path=ppt/notesSlides/notesSlide6.xml><?xml version="1.0" encoding="utf-8"?>
 <p:notes xmlns:a="http://schemas.openxmlformats.org/drawingml/2006/main" xmlns:r="http://schemas.openxmlformats.org/officeDocument/2006/relationships" xmlns:p="http://schemas.openxmlformats.org/presentationml/2006/main">
   <p:cSld>
     <p:spTree>
@@ -1195,7 +1412,7 @@
           <a:p>
             <a:fld id="{11BBE17A-011E-42C8-B886-9AAF15091A83}" type="slidenum">
               <a:rPr lang="en-US" smtClean="0"/>
-              <a:t>10</a:t>
+              <a:t>11</a:t>
             </a:fld>
             <a:endParaRPr lang="en-US"/>
           </a:p>
@@ -1214,7 +1431,7 @@
 </p:notes>
 </file>
 
-<file path=ppt/notesSlides/notesSlide6.xml><?xml version="1.0" encoding="utf-8"?>
+<file path=ppt/notesSlides/notesSlide7.xml><?xml version="1.0" encoding="utf-8"?>
 <p:notes xmlns:a="http://schemas.openxmlformats.org/drawingml/2006/main" xmlns:r="http://schemas.openxmlformats.org/officeDocument/2006/relationships" xmlns:p="http://schemas.openxmlformats.org/presentationml/2006/main">
   <p:cSld>
     <p:spTree>
@@ -1303,7 +1520,7 @@
           <a:p>
             <a:fld id="{11BBE17A-011E-42C8-B886-9AAF15091A83}" type="slidenum">
               <a:rPr lang="en-US" smtClean="0"/>
-              <a:t>11</a:t>
+              <a:t>12</a:t>
             </a:fld>
             <a:endParaRPr lang="en-US"/>
           </a:p>
@@ -1322,7 +1539,7 @@
 </p:notes>
 </file>
 
-<file path=ppt/notesSlides/notesSlide7.xml><?xml version="1.0" encoding="utf-8"?>
+<file path=ppt/notesSlides/notesSlide8.xml><?xml version="1.0" encoding="utf-8"?>
 <p:notes xmlns:a="http://schemas.openxmlformats.org/drawingml/2006/main" xmlns:r="http://schemas.openxmlformats.org/officeDocument/2006/relationships" xmlns:p="http://schemas.openxmlformats.org/presentationml/2006/main">
   <p:cSld>
     <p:spTree>
@@ -1411,7 +1628,7 @@
           <a:p>
             <a:fld id="{11BBE17A-011E-42C8-B886-9AAF15091A83}" type="slidenum">
               <a:rPr lang="en-US" smtClean="0"/>
-              <a:t>12</a:t>
+              <a:t>13</a:t>
             </a:fld>
             <a:endParaRPr lang="en-US"/>
           </a:p>
@@ -1430,7 +1647,7 @@
 </p:notes>
 </file>
 
-<file path=ppt/notesSlides/notesSlide8.xml><?xml version="1.0" encoding="utf-8"?>
+<file path=ppt/notesSlides/notesSlide9.xml><?xml version="1.0" encoding="utf-8"?>
 <p:notes xmlns:a="http://schemas.openxmlformats.org/drawingml/2006/main" xmlns:r="http://schemas.openxmlformats.org/officeDocument/2006/relationships" xmlns:p="http://schemas.openxmlformats.org/presentationml/2006/main">
   <p:cSld>
     <p:spTree>
@@ -1519,7 +1736,7 @@
           <a:p>
             <a:fld id="{11BBE17A-011E-42C8-B886-9AAF15091A83}" type="slidenum">
               <a:rPr lang="en-US" smtClean="0"/>
-              <a:t>16</a:t>
+              <a:t>17</a:t>
             </a:fld>
             <a:endParaRPr lang="en-US"/>
           </a:p>
@@ -1529,114 +1746,6 @@
     <p:extLst>
       <p:ext uri="{BB962C8B-B14F-4D97-AF65-F5344CB8AC3E}">
         <p14:creationId xmlns:p14="http://schemas.microsoft.com/office/powerpoint/2010/main" val="425842974"/>
-      </p:ext>
-    </p:extLst>
-  </p:cSld>
-  <p:clrMapOvr>
-    <a:masterClrMapping/>
-  </p:clrMapOvr>
-</p:notes>
-</file>
-
-<file path=ppt/notesSlides/notesSlide9.xml><?xml version="1.0" encoding="utf-8"?>
-<p:notes xmlns:a="http://schemas.openxmlformats.org/drawingml/2006/main" xmlns:r="http://schemas.openxmlformats.org/officeDocument/2006/relationships" xmlns:p="http://schemas.openxmlformats.org/presentationml/2006/main">
-  <p:cSld>
-    <p:spTree>
-      <p:nvGrpSpPr>
-        <p:cNvPr id="1" name="">
-          <a:extLst>
-            <a:ext uri="{FF2B5EF4-FFF2-40B4-BE49-F238E27FC236}">
-              <a16:creationId xmlns:a16="http://schemas.microsoft.com/office/drawing/2014/main" id="{514B7D9F-874C-C279-1C94-F95AB9F3F8EE}"/>
-            </a:ext>
-          </a:extLst>
-        </p:cNvPr>
-        <p:cNvGrpSpPr/>
-        <p:nvPr/>
-      </p:nvGrpSpPr>
-      <p:grpSpPr>
-        <a:xfrm>
-          <a:off x="0" y="0"/>
-          <a:ext cx="0" cy="0"/>
-          <a:chOff x="0" y="0"/>
-          <a:chExt cx="0" cy="0"/>
-        </a:xfrm>
-      </p:grpSpPr>
-      <p:sp>
-        <p:nvSpPr>
-          <p:cNvPr id="2" name="Slide Image Placeholder 1">
-            <a:extLst>
-              <a:ext uri="{FF2B5EF4-FFF2-40B4-BE49-F238E27FC236}">
-                <a16:creationId xmlns:a16="http://schemas.microsoft.com/office/drawing/2014/main" id="{59C36AA4-B4F6-4261-CC64-C67A0DEFC6C0}"/>
-              </a:ext>
-            </a:extLst>
-          </p:cNvPr>
-          <p:cNvSpPr>
-            <a:spLocks noGrp="1" noRot="1" noChangeAspect="1"/>
-          </p:cNvSpPr>
-          <p:nvPr>
-            <p:ph type="sldImg"/>
-          </p:nvPr>
-        </p:nvSpPr>
-        <p:spPr/>
-      </p:sp>
-      <p:sp>
-        <p:nvSpPr>
-          <p:cNvPr id="3" name="Notes Placeholder 2">
-            <a:extLst>
-              <a:ext uri="{FF2B5EF4-FFF2-40B4-BE49-F238E27FC236}">
-                <a16:creationId xmlns:a16="http://schemas.microsoft.com/office/drawing/2014/main" id="{149D8D07-3C13-9014-32A6-D9CE09366172}"/>
-              </a:ext>
-            </a:extLst>
-          </p:cNvPr>
-          <p:cNvSpPr>
-            <a:spLocks noGrp="1"/>
-          </p:cNvSpPr>
-          <p:nvPr>
-            <p:ph type="body" idx="1"/>
-          </p:nvPr>
-        </p:nvSpPr>
-        <p:spPr/>
-        <p:txBody>
-          <a:bodyPr/>
-          <a:lstStyle/>
-          <a:p>
-            <a:endParaRPr lang="en-US" dirty="0"/>
-          </a:p>
-        </p:txBody>
-      </p:sp>
-      <p:sp>
-        <p:nvSpPr>
-          <p:cNvPr id="4" name="Slide Number Placeholder 3">
-            <a:extLst>
-              <a:ext uri="{FF2B5EF4-FFF2-40B4-BE49-F238E27FC236}">
-                <a16:creationId xmlns:a16="http://schemas.microsoft.com/office/drawing/2014/main" id="{B371BABC-9D62-F188-E1F5-A9B2225FA6DF}"/>
-              </a:ext>
-            </a:extLst>
-          </p:cNvPr>
-          <p:cNvSpPr>
-            <a:spLocks noGrp="1"/>
-          </p:cNvSpPr>
-          <p:nvPr>
-            <p:ph type="sldNum" sz="quarter" idx="5"/>
-          </p:nvPr>
-        </p:nvSpPr>
-        <p:spPr/>
-        <p:txBody>
-          <a:bodyPr/>
-          <a:lstStyle/>
-          <a:p>
-            <a:fld id="{11BBE17A-011E-42C8-B886-9AAF15091A83}" type="slidenum">
-              <a:rPr lang="en-US" smtClean="0"/>
-              <a:t>17</a:t>
-            </a:fld>
-            <a:endParaRPr lang="en-US"/>
-          </a:p>
-        </p:txBody>
-      </p:sp>
-    </p:spTree>
-    <p:extLst>
-      <p:ext uri="{BB962C8B-B14F-4D97-AF65-F5344CB8AC3E}">
-        <p14:creationId xmlns:p14="http://schemas.microsoft.com/office/powerpoint/2010/main" val="3328442210"/>
       </p:ext>
     </p:extLst>
   </p:cSld>
@@ -1793,7 +1902,7 @@
           <a:p>
             <a:fld id="{5F8D886E-E654-4DF1-A3A6-2277A53517B0}" type="datetimeFigureOut">
               <a:rPr lang="en-US" smtClean="0"/>
-              <a:t>7/21/2026</a:t>
+              <a:t>7/22/2026</a:t>
             </a:fld>
             <a:endParaRPr lang="en-US"/>
           </a:p>
@@ -1991,7 +2100,7 @@
           <a:p>
             <a:fld id="{5F8D886E-E654-4DF1-A3A6-2277A53517B0}" type="datetimeFigureOut">
               <a:rPr lang="en-US" smtClean="0"/>
-              <a:t>7/21/2026</a:t>
+              <a:t>7/22/2026</a:t>
             </a:fld>
             <a:endParaRPr lang="en-US"/>
           </a:p>
@@ -2199,7 +2308,7 @@
           <a:p>
             <a:fld id="{5F8D886E-E654-4DF1-A3A6-2277A53517B0}" type="datetimeFigureOut">
               <a:rPr lang="en-US" smtClean="0"/>
-              <a:t>7/21/2026</a:t>
+              <a:t>7/22/2026</a:t>
             </a:fld>
             <a:endParaRPr lang="en-US"/>
           </a:p>
@@ -2397,7 +2506,7 @@
           <a:p>
             <a:fld id="{5F8D886E-E654-4DF1-A3A6-2277A53517B0}" type="datetimeFigureOut">
               <a:rPr lang="en-US" smtClean="0"/>
-              <a:t>7/21/2026</a:t>
+              <a:t>7/22/2026</a:t>
             </a:fld>
             <a:endParaRPr lang="en-US"/>
           </a:p>
@@ -2672,7 +2781,7 @@
           <a:p>
             <a:fld id="{5F8D886E-E654-4DF1-A3A6-2277A53517B0}" type="datetimeFigureOut">
               <a:rPr lang="en-US" smtClean="0"/>
-              <a:t>7/21/2026</a:t>
+              <a:t>7/22/2026</a:t>
             </a:fld>
             <a:endParaRPr lang="en-US"/>
           </a:p>
@@ -2937,7 +3046,7 @@
           <a:p>
             <a:fld id="{5F8D886E-E654-4DF1-A3A6-2277A53517B0}" type="datetimeFigureOut">
               <a:rPr lang="en-US" smtClean="0"/>
-              <a:t>7/21/2026</a:t>
+              <a:t>7/22/2026</a:t>
             </a:fld>
             <a:endParaRPr lang="en-US"/>
           </a:p>
@@ -3349,7 +3458,7 @@
           <a:p>
             <a:fld id="{5F8D886E-E654-4DF1-A3A6-2277A53517B0}" type="datetimeFigureOut">
               <a:rPr lang="en-US" smtClean="0"/>
-              <a:t>7/21/2026</a:t>
+              <a:t>7/22/2026</a:t>
             </a:fld>
             <a:endParaRPr lang="en-US"/>
           </a:p>
@@ -3490,7 +3599,7 @@
           <a:p>
             <a:fld id="{5F8D886E-E654-4DF1-A3A6-2277A53517B0}" type="datetimeFigureOut">
               <a:rPr lang="en-US" smtClean="0"/>
-              <a:t>7/21/2026</a:t>
+              <a:t>7/22/2026</a:t>
             </a:fld>
             <a:endParaRPr lang="en-US"/>
           </a:p>
@@ -3603,7 +3712,7 @@
           <a:p>
             <a:fld id="{5F8D886E-E654-4DF1-A3A6-2277A53517B0}" type="datetimeFigureOut">
               <a:rPr lang="en-US" smtClean="0"/>
-              <a:t>7/21/2026</a:t>
+              <a:t>7/22/2026</a:t>
             </a:fld>
             <a:endParaRPr lang="en-US"/>
           </a:p>
@@ -3914,7 +4023,7 @@
           <a:p>
             <a:fld id="{5F8D886E-E654-4DF1-A3A6-2277A53517B0}" type="datetimeFigureOut">
               <a:rPr lang="en-US" smtClean="0"/>
-              <a:t>7/21/2026</a:t>
+              <a:t>7/22/2026</a:t>
             </a:fld>
             <a:endParaRPr lang="en-US"/>
           </a:p>
@@ -4202,7 +4311,7 @@
           <a:p>
             <a:fld id="{5F8D886E-E654-4DF1-A3A6-2277A53517B0}" type="datetimeFigureOut">
               <a:rPr lang="en-US" smtClean="0"/>
-              <a:t>7/21/2026</a:t>
+              <a:t>7/22/2026</a:t>
             </a:fld>
             <a:endParaRPr lang="en-US"/>
           </a:p>
@@ -4443,7 +4552,7 @@
           <a:p>
             <a:fld id="{5F8D886E-E654-4DF1-A3A6-2277A53517B0}" type="datetimeFigureOut">
               <a:rPr lang="en-US" smtClean="0"/>
-              <a:t>7/21/2026</a:t>
+              <a:t>7/22/2026</a:t>
             </a:fld>
             <a:endParaRPr lang="en-US"/>
           </a:p>
@@ -4968,6 +5077,306 @@
         <p:cNvPr id="1" name="">
           <a:extLst>
             <a:ext uri="{FF2B5EF4-FFF2-40B4-BE49-F238E27FC236}">
+              <a16:creationId xmlns:a16="http://schemas.microsoft.com/office/drawing/2014/main" id="{4C175A8F-A494-F55F-88CD-5AC660F53112}"/>
+            </a:ext>
+          </a:extLst>
+        </p:cNvPr>
+        <p:cNvGrpSpPr/>
+        <p:nvPr/>
+      </p:nvGrpSpPr>
+      <p:grpSpPr>
+        <a:xfrm>
+          <a:off x="0" y="0"/>
+          <a:ext cx="0" cy="0"/>
+          <a:chOff x="0" y="0"/>
+          <a:chExt cx="0" cy="0"/>
+        </a:xfrm>
+      </p:grpSpPr>
+      <p:pic>
+        <p:nvPicPr>
+          <p:cNvPr id="5" name="Picture 4">
+            <a:extLst>
+              <a:ext uri="{FF2B5EF4-FFF2-40B4-BE49-F238E27FC236}">
+                <a16:creationId xmlns:a16="http://schemas.microsoft.com/office/drawing/2014/main" id="{75E06F87-964B-3BAA-027D-849EF41C1834}"/>
+              </a:ext>
+            </a:extLst>
+          </p:cNvPr>
+          <p:cNvPicPr>
+            <a:picLocks noChangeAspect="1"/>
+          </p:cNvPicPr>
+          <p:nvPr/>
+        </p:nvPicPr>
+        <p:blipFill>
+          <a:blip r:embed="rId3"/>
+          <a:stretch>
+            <a:fillRect/>
+          </a:stretch>
+        </p:blipFill>
+        <p:spPr>
+          <a:xfrm>
+            <a:off x="4660362" y="0"/>
+            <a:ext cx="7531638" cy="6858000"/>
+          </a:xfrm>
+          <a:prstGeom prst="rect">
+            <a:avLst/>
+          </a:prstGeom>
+        </p:spPr>
+      </p:pic>
+      <p:sp>
+        <p:nvSpPr>
+          <p:cNvPr id="2" name="Title 1">
+            <a:extLst>
+              <a:ext uri="{FF2B5EF4-FFF2-40B4-BE49-F238E27FC236}">
+                <a16:creationId xmlns:a16="http://schemas.microsoft.com/office/drawing/2014/main" id="{FF9F883F-517D-295B-67EE-5C1465D43836}"/>
+              </a:ext>
+            </a:extLst>
+          </p:cNvPr>
+          <p:cNvSpPr>
+            <a:spLocks noGrp="1"/>
+          </p:cNvSpPr>
+          <p:nvPr>
+            <p:ph type="title"/>
+          </p:nvPr>
+        </p:nvSpPr>
+        <p:spPr/>
+        <p:txBody>
+          <a:bodyPr/>
+          <a:lstStyle/>
+          <a:p>
+            <a:r>
+              <a:rPr lang="en-US" dirty="0">
+                <a:latin typeface="Aharoni" panose="02010803020104030203" pitchFamily="2" charset="-79"/>
+                <a:cs typeface="Aharoni" panose="02010803020104030203" pitchFamily="2" charset="-79"/>
+              </a:rPr>
+              <a:t>Correlation plot</a:t>
+            </a:r>
+          </a:p>
+        </p:txBody>
+      </p:sp>
+      <p:sp>
+        <p:nvSpPr>
+          <p:cNvPr id="7" name="Content Placeholder 2">
+            <a:extLst>
+              <a:ext uri="{FF2B5EF4-FFF2-40B4-BE49-F238E27FC236}">
+                <a16:creationId xmlns:a16="http://schemas.microsoft.com/office/drawing/2014/main" id="{0A3ED50B-3B9A-BC16-ACA4-CF9DBD856176}"/>
+              </a:ext>
+            </a:extLst>
+          </p:cNvPr>
+          <p:cNvSpPr>
+            <a:spLocks noGrp="1"/>
+          </p:cNvSpPr>
+          <p:nvPr>
+            <p:ph idx="1"/>
+          </p:nvPr>
+        </p:nvSpPr>
+        <p:spPr>
+          <a:xfrm>
+            <a:off x="637478" y="1825625"/>
+            <a:ext cx="4492083" cy="4809351"/>
+          </a:xfrm>
+        </p:spPr>
+        <p:txBody>
+          <a:bodyPr>
+            <a:normAutofit/>
+          </a:bodyPr>
+          <a:lstStyle/>
+          <a:p>
+            <a:r>
+              <a:rPr lang="en-US" dirty="0">
+                <a:latin typeface="Abadi" panose="020B0604020104020204" pitchFamily="34" charset="0"/>
+              </a:rPr>
+              <a:t>Read csv into R</a:t>
+            </a:r>
+          </a:p>
+          <a:p>
+            <a:r>
+              <a:rPr lang="en-US" dirty="0">
+                <a:latin typeface="Abadi" panose="020B0604020104020204" pitchFamily="34" charset="0"/>
+              </a:rPr>
+              <a:t>Load </a:t>
+            </a:r>
+            <a:r>
+              <a:rPr lang="en-US" dirty="0" err="1">
+                <a:latin typeface="Abadi" panose="020B0604020104020204" pitchFamily="34" charset="0"/>
+              </a:rPr>
+              <a:t>tidyverse</a:t>
+            </a:r>
+            <a:r>
+              <a:rPr lang="en-US" dirty="0">
+                <a:latin typeface="Abadi" panose="020B0604020104020204" pitchFamily="34" charset="0"/>
+              </a:rPr>
+              <a:t> and </a:t>
+            </a:r>
+            <a:r>
+              <a:rPr lang="en-US" dirty="0" err="1">
+                <a:latin typeface="Abadi" panose="020B0604020104020204" pitchFamily="34" charset="0"/>
+              </a:rPr>
+              <a:t>corrplot</a:t>
+            </a:r>
+            <a:endParaRPr lang="en-US" dirty="0">
+              <a:latin typeface="Abadi" panose="020B0604020104020204" pitchFamily="34" charset="0"/>
+            </a:endParaRPr>
+          </a:p>
+          <a:p>
+            <a:r>
+              <a:rPr lang="en-US" dirty="0">
+                <a:latin typeface="Abadi" panose="020B0604020104020204" pitchFamily="34" charset="0"/>
+              </a:rPr>
+              <a:t>Make a correlation matrix</a:t>
+            </a:r>
+          </a:p>
+          <a:p>
+            <a:r>
+              <a:rPr lang="en-US" dirty="0">
+                <a:latin typeface="Abadi" panose="020B0604020104020204" pitchFamily="34" charset="0"/>
+              </a:rPr>
+              <a:t>Plot with </a:t>
+            </a:r>
+            <a:r>
+              <a:rPr lang="en-US" dirty="0" err="1">
+                <a:latin typeface="Abadi" panose="020B0604020104020204" pitchFamily="34" charset="0"/>
+              </a:rPr>
+              <a:t>corrplot</a:t>
+            </a:r>
+            <a:endParaRPr lang="en-US" dirty="0">
+              <a:latin typeface="Abadi" panose="020B0604020104020204" pitchFamily="34" charset="0"/>
+            </a:endParaRPr>
+          </a:p>
+          <a:p>
+            <a:r>
+              <a:rPr lang="en-US" dirty="0">
+                <a:latin typeface="Abadi" panose="020B0604020104020204" pitchFamily="34" charset="0"/>
+              </a:rPr>
+              <a:t>Plot a more complex version</a:t>
+            </a:r>
+          </a:p>
+        </p:txBody>
+      </p:sp>
+      <p:sp>
+        <p:nvSpPr>
+          <p:cNvPr id="6" name="Oval 5">
+            <a:extLst>
+              <a:ext uri="{FF2B5EF4-FFF2-40B4-BE49-F238E27FC236}">
+                <a16:creationId xmlns:a16="http://schemas.microsoft.com/office/drawing/2014/main" id="{DA5A1DDB-128F-9927-8397-C9B69B8890C8}"/>
+              </a:ext>
+            </a:extLst>
+          </p:cNvPr>
+          <p:cNvSpPr/>
+          <p:nvPr/>
+        </p:nvSpPr>
+        <p:spPr>
+          <a:xfrm>
+            <a:off x="8697951" y="1825625"/>
+            <a:ext cx="724829" cy="794912"/>
+          </a:xfrm>
+          <a:prstGeom prst="ellipse">
+            <a:avLst/>
+          </a:prstGeom>
+          <a:noFill/>
+          <a:ln w="57150">
+            <a:solidFill>
+              <a:srgbClr val="FF0000"/>
+            </a:solidFill>
+          </a:ln>
+        </p:spPr>
+        <p:style>
+          <a:lnRef idx="2">
+            <a:schemeClr val="accent1">
+              <a:shade val="15000"/>
+            </a:schemeClr>
+          </a:lnRef>
+          <a:fillRef idx="1">
+            <a:schemeClr val="accent1"/>
+          </a:fillRef>
+          <a:effectRef idx="0">
+            <a:schemeClr val="accent1"/>
+          </a:effectRef>
+          <a:fontRef idx="minor">
+            <a:schemeClr val="lt1"/>
+          </a:fontRef>
+        </p:style>
+        <p:txBody>
+          <a:bodyPr rtlCol="0" anchor="ctr"/>
+          <a:lstStyle/>
+          <a:p>
+            <a:pPr algn="ctr"/>
+            <a:endParaRPr lang="en-US"/>
+          </a:p>
+        </p:txBody>
+      </p:sp>
+      <p:sp>
+        <p:nvSpPr>
+          <p:cNvPr id="9" name="Oval 8">
+            <a:extLst>
+              <a:ext uri="{FF2B5EF4-FFF2-40B4-BE49-F238E27FC236}">
+                <a16:creationId xmlns:a16="http://schemas.microsoft.com/office/drawing/2014/main" id="{C7CA6624-9061-3A8E-D066-156948F623CC}"/>
+              </a:ext>
+            </a:extLst>
+          </p:cNvPr>
+          <p:cNvSpPr/>
+          <p:nvPr/>
+        </p:nvSpPr>
+        <p:spPr>
+          <a:xfrm>
+            <a:off x="6607096" y="3928927"/>
+            <a:ext cx="724829" cy="794912"/>
+          </a:xfrm>
+          <a:prstGeom prst="ellipse">
+            <a:avLst/>
+          </a:prstGeom>
+          <a:noFill/>
+          <a:ln w="57150">
+            <a:solidFill>
+              <a:srgbClr val="FF0000"/>
+            </a:solidFill>
+          </a:ln>
+        </p:spPr>
+        <p:style>
+          <a:lnRef idx="2">
+            <a:schemeClr val="accent1">
+              <a:shade val="15000"/>
+            </a:schemeClr>
+          </a:lnRef>
+          <a:fillRef idx="1">
+            <a:schemeClr val="accent1"/>
+          </a:fillRef>
+          <a:effectRef idx="0">
+            <a:schemeClr val="accent1"/>
+          </a:effectRef>
+          <a:fontRef idx="minor">
+            <a:schemeClr val="lt1"/>
+          </a:fontRef>
+        </p:style>
+        <p:txBody>
+          <a:bodyPr rtlCol="0" anchor="ctr"/>
+          <a:lstStyle/>
+          <a:p>
+            <a:pPr algn="ctr"/>
+            <a:endParaRPr lang="en-US"/>
+          </a:p>
+        </p:txBody>
+      </p:sp>
+    </p:spTree>
+    <p:extLst>
+      <p:ext uri="{BB962C8B-B14F-4D97-AF65-F5344CB8AC3E}">
+        <p14:creationId xmlns:p14="http://schemas.microsoft.com/office/powerpoint/2010/main" val="4084528048"/>
+      </p:ext>
+    </p:extLst>
+  </p:cSld>
+  <p:clrMapOvr>
+    <a:masterClrMapping/>
+  </p:clrMapOvr>
+</p:sld>
+</file>
+
+<file path=ppt/slides/slide11.xml><?xml version="1.0" encoding="utf-8"?>
+<p:sld xmlns:a="http://schemas.openxmlformats.org/drawingml/2006/main" xmlns:r="http://schemas.openxmlformats.org/officeDocument/2006/relationships" xmlns:p="http://schemas.openxmlformats.org/presentationml/2006/main">
+  <p:cSld>
+    <p:spTree>
+      <p:nvGrpSpPr>
+        <p:cNvPr id="1" name="">
+          <a:extLst>
+            <a:ext uri="{FF2B5EF4-FFF2-40B4-BE49-F238E27FC236}">
               <a16:creationId xmlns:a16="http://schemas.microsoft.com/office/drawing/2014/main" id="{160F9963-D70E-782E-970C-40A5493CA40D}"/>
             </a:ext>
           </a:extLst>
@@ -5154,7 +5563,7 @@
               <a:rPr lang="en-US" sz="1800" dirty="0">
                 <a:latin typeface="Abadi" panose="020B0604020104020204" pitchFamily="34" charset="0"/>
               </a:rPr>
-              <a:t>“) +</a:t>
+              <a:t>") +</a:t>
             </a:r>
           </a:p>
           <a:p>
@@ -5346,7 +5755,7 @@
 </p:sld>
 </file>
 
-<file path=ppt/slides/slide11.xml><?xml version="1.0" encoding="utf-8"?>
+<file path=ppt/slides/slide12.xml><?xml version="1.0" encoding="utf-8"?>
 <p:sld xmlns:a="http://schemas.openxmlformats.org/drawingml/2006/main" xmlns:r="http://schemas.openxmlformats.org/officeDocument/2006/relationships" xmlns:p="http://schemas.openxmlformats.org/presentationml/2006/main">
   <p:cSld>
     <p:spTree>
@@ -5768,7 +6177,7 @@
 </p:sld>
 </file>
 
-<file path=ppt/slides/slide12.xml><?xml version="1.0" encoding="utf-8"?>
+<file path=ppt/slides/slide13.xml><?xml version="1.0" encoding="utf-8"?>
 <p:sld xmlns:a="http://schemas.openxmlformats.org/drawingml/2006/main" xmlns:r="http://schemas.openxmlformats.org/officeDocument/2006/relationships" xmlns:p="http://schemas.openxmlformats.org/presentationml/2006/main">
   <p:cSld>
     <p:spTree>
@@ -5842,7 +6251,7 @@
 </p:sld>
 </file>
 
-<file path=ppt/slides/slide13.xml><?xml version="1.0" encoding="utf-8"?>
+<file path=ppt/slides/slide14.xml><?xml version="1.0" encoding="utf-8"?>
 <p:sld xmlns:a="http://schemas.openxmlformats.org/drawingml/2006/main" xmlns:r="http://schemas.openxmlformats.org/officeDocument/2006/relationships" xmlns:p="http://schemas.openxmlformats.org/presentationml/2006/main">
   <p:cSld>
     <p:spTree>
@@ -14080,7 +14489,7 @@
 </p:sld>
 </file>
 
-<file path=ppt/slides/slide14.xml><?xml version="1.0" encoding="utf-8"?>
+<file path=ppt/slides/slide15.xml><?xml version="1.0" encoding="utf-8"?>
 <p:sld xmlns:a="http://schemas.openxmlformats.org/drawingml/2006/main" xmlns:r="http://schemas.openxmlformats.org/officeDocument/2006/relationships" xmlns:p="http://schemas.openxmlformats.org/presentationml/2006/main">
   <p:cSld>
     <p:spTree>
@@ -15015,7 +15424,7 @@
 </p:sld>
 </file>
 
-<file path=ppt/slides/slide15.xml><?xml version="1.0" encoding="utf-8"?>
+<file path=ppt/slides/slide16.xml><?xml version="1.0" encoding="utf-8"?>
 <p:sld xmlns:a="http://schemas.openxmlformats.org/drawingml/2006/main" xmlns:r="http://schemas.openxmlformats.org/officeDocument/2006/relationships" xmlns:p="http://schemas.openxmlformats.org/presentationml/2006/main">
   <p:cSld>
     <p:spTree>
@@ -15335,7 +15744,7 @@
 </p:sld>
 </file>
 
-<file path=ppt/slides/slide16.xml><?xml version="1.0" encoding="utf-8"?>
+<file path=ppt/slides/slide17.xml><?xml version="1.0" encoding="utf-8"?>
 <p:sld xmlns:a="http://schemas.openxmlformats.org/drawingml/2006/main" xmlns:r="http://schemas.openxmlformats.org/officeDocument/2006/relationships" xmlns:p="http://schemas.openxmlformats.org/presentationml/2006/main">
   <p:cSld>
     <p:spTree>
@@ -15653,10 +16062,325 @@
   <p:clrMapOvr>
     <a:masterClrMapping/>
   </p:clrMapOvr>
+  <p:timing>
+    <p:tnLst>
+      <p:par>
+        <p:cTn id="1" dur="indefinite" restart="never" nodeType="tmRoot">
+          <p:childTnLst>
+            <p:seq concurrent="1" nextAc="seek">
+              <p:cTn id="2" dur="indefinite" nodeType="mainSeq">
+                <p:childTnLst>
+                  <p:par>
+                    <p:cTn id="3" fill="hold">
+                      <p:stCondLst>
+                        <p:cond delay="indefinite"/>
+                      </p:stCondLst>
+                      <p:childTnLst>
+                        <p:par>
+                          <p:cTn id="4" fill="hold">
+                            <p:stCondLst>
+                              <p:cond delay="0"/>
+                            </p:stCondLst>
+                            <p:childTnLst>
+                              <p:par>
+                                <p:cTn id="5" presetID="1" presetClass="entr" presetSubtype="0" fill="hold" grpId="0" nodeType="clickEffect">
+                                  <p:stCondLst>
+                                    <p:cond delay="0"/>
+                                  </p:stCondLst>
+                                  <p:childTnLst>
+                                    <p:set>
+                                      <p:cBhvr>
+                                        <p:cTn id="6" dur="1" fill="hold">
+                                          <p:stCondLst>
+                                            <p:cond delay="0"/>
+                                          </p:stCondLst>
+                                        </p:cTn>
+                                        <p:tgtEl>
+                                          <p:spTgt spid="7">
+                                            <p:txEl>
+                                              <p:pRg st="0" end="0"/>
+                                            </p:txEl>
+                                          </p:spTgt>
+                                        </p:tgtEl>
+                                        <p:attrNameLst>
+                                          <p:attrName>style.visibility</p:attrName>
+                                        </p:attrNameLst>
+                                      </p:cBhvr>
+                                      <p:to>
+                                        <p:strVal val="visible"/>
+                                      </p:to>
+                                    </p:set>
+                                  </p:childTnLst>
+                                </p:cTn>
+                              </p:par>
+                            </p:childTnLst>
+                          </p:cTn>
+                        </p:par>
+                      </p:childTnLst>
+                    </p:cTn>
+                  </p:par>
+                  <p:par>
+                    <p:cTn id="7" fill="hold">
+                      <p:stCondLst>
+                        <p:cond delay="indefinite"/>
+                      </p:stCondLst>
+                      <p:childTnLst>
+                        <p:par>
+                          <p:cTn id="8" fill="hold">
+                            <p:stCondLst>
+                              <p:cond delay="0"/>
+                            </p:stCondLst>
+                            <p:childTnLst>
+                              <p:par>
+                                <p:cTn id="9" presetID="1" presetClass="entr" presetSubtype="0" fill="hold" grpId="0" nodeType="clickEffect">
+                                  <p:stCondLst>
+                                    <p:cond delay="0"/>
+                                  </p:stCondLst>
+                                  <p:childTnLst>
+                                    <p:set>
+                                      <p:cBhvr>
+                                        <p:cTn id="10" dur="1" fill="hold">
+                                          <p:stCondLst>
+                                            <p:cond delay="0"/>
+                                          </p:stCondLst>
+                                        </p:cTn>
+                                        <p:tgtEl>
+                                          <p:spTgt spid="7">
+                                            <p:txEl>
+                                              <p:pRg st="1" end="1"/>
+                                            </p:txEl>
+                                          </p:spTgt>
+                                        </p:tgtEl>
+                                        <p:attrNameLst>
+                                          <p:attrName>style.visibility</p:attrName>
+                                        </p:attrNameLst>
+                                      </p:cBhvr>
+                                      <p:to>
+                                        <p:strVal val="visible"/>
+                                      </p:to>
+                                    </p:set>
+                                  </p:childTnLst>
+                                </p:cTn>
+                              </p:par>
+                            </p:childTnLst>
+                          </p:cTn>
+                        </p:par>
+                      </p:childTnLst>
+                    </p:cTn>
+                  </p:par>
+                  <p:par>
+                    <p:cTn id="11" fill="hold">
+                      <p:stCondLst>
+                        <p:cond delay="indefinite"/>
+                      </p:stCondLst>
+                      <p:childTnLst>
+                        <p:par>
+                          <p:cTn id="12" fill="hold">
+                            <p:stCondLst>
+                              <p:cond delay="0"/>
+                            </p:stCondLst>
+                            <p:childTnLst>
+                              <p:par>
+                                <p:cTn id="13" presetID="1" presetClass="entr" presetSubtype="0" fill="hold" grpId="0" nodeType="clickEffect">
+                                  <p:stCondLst>
+                                    <p:cond delay="0"/>
+                                  </p:stCondLst>
+                                  <p:childTnLst>
+                                    <p:set>
+                                      <p:cBhvr>
+                                        <p:cTn id="14" dur="1" fill="hold">
+                                          <p:stCondLst>
+                                            <p:cond delay="0"/>
+                                          </p:stCondLst>
+                                        </p:cTn>
+                                        <p:tgtEl>
+                                          <p:spTgt spid="7">
+                                            <p:txEl>
+                                              <p:pRg st="2" end="2"/>
+                                            </p:txEl>
+                                          </p:spTgt>
+                                        </p:tgtEl>
+                                        <p:attrNameLst>
+                                          <p:attrName>style.visibility</p:attrName>
+                                        </p:attrNameLst>
+                                      </p:cBhvr>
+                                      <p:to>
+                                        <p:strVal val="visible"/>
+                                      </p:to>
+                                    </p:set>
+                                  </p:childTnLst>
+                                </p:cTn>
+                              </p:par>
+                            </p:childTnLst>
+                          </p:cTn>
+                        </p:par>
+                      </p:childTnLst>
+                    </p:cTn>
+                  </p:par>
+                  <p:par>
+                    <p:cTn id="15" fill="hold">
+                      <p:stCondLst>
+                        <p:cond delay="indefinite"/>
+                      </p:stCondLst>
+                      <p:childTnLst>
+                        <p:par>
+                          <p:cTn id="16" fill="hold">
+                            <p:stCondLst>
+                              <p:cond delay="0"/>
+                            </p:stCondLst>
+                            <p:childTnLst>
+                              <p:par>
+                                <p:cTn id="17" presetID="1" presetClass="entr" presetSubtype="0" fill="hold" nodeType="clickEffect">
+                                  <p:stCondLst>
+                                    <p:cond delay="0"/>
+                                  </p:stCondLst>
+                                  <p:childTnLst>
+                                    <p:set>
+                                      <p:cBhvr>
+                                        <p:cTn id="18" dur="1" fill="hold">
+                                          <p:stCondLst>
+                                            <p:cond delay="0"/>
+                                          </p:stCondLst>
+                                        </p:cTn>
+                                        <p:tgtEl>
+                                          <p:spTgt spid="6"/>
+                                        </p:tgtEl>
+                                        <p:attrNameLst>
+                                          <p:attrName>style.visibility</p:attrName>
+                                        </p:attrNameLst>
+                                      </p:cBhvr>
+                                      <p:to>
+                                        <p:strVal val="visible"/>
+                                      </p:to>
+                                    </p:set>
+                                  </p:childTnLst>
+                                </p:cTn>
+                              </p:par>
+                            </p:childTnLst>
+                          </p:cTn>
+                        </p:par>
+                      </p:childTnLst>
+                    </p:cTn>
+                  </p:par>
+                  <p:par>
+                    <p:cTn id="19" fill="hold">
+                      <p:stCondLst>
+                        <p:cond delay="indefinite"/>
+                      </p:stCondLst>
+                      <p:childTnLst>
+                        <p:par>
+                          <p:cTn id="20" fill="hold">
+                            <p:stCondLst>
+                              <p:cond delay="0"/>
+                            </p:stCondLst>
+                            <p:childTnLst>
+                              <p:par>
+                                <p:cTn id="21" presetID="1" presetClass="entr" presetSubtype="0" fill="hold" nodeType="clickEffect">
+                                  <p:stCondLst>
+                                    <p:cond delay="0"/>
+                                  </p:stCondLst>
+                                  <p:childTnLst>
+                                    <p:set>
+                                      <p:cBhvr>
+                                        <p:cTn id="22" dur="1" fill="hold">
+                                          <p:stCondLst>
+                                            <p:cond delay="0"/>
+                                          </p:stCondLst>
+                                        </p:cTn>
+                                        <p:tgtEl>
+                                          <p:spTgt spid="9"/>
+                                        </p:tgtEl>
+                                        <p:attrNameLst>
+                                          <p:attrName>style.visibility</p:attrName>
+                                        </p:attrNameLst>
+                                      </p:cBhvr>
+                                      <p:to>
+                                        <p:strVal val="visible"/>
+                                      </p:to>
+                                    </p:set>
+                                  </p:childTnLst>
+                                </p:cTn>
+                              </p:par>
+                            </p:childTnLst>
+                          </p:cTn>
+                        </p:par>
+                      </p:childTnLst>
+                    </p:cTn>
+                  </p:par>
+                  <p:par>
+                    <p:cTn id="23" fill="hold">
+                      <p:stCondLst>
+                        <p:cond delay="indefinite"/>
+                      </p:stCondLst>
+                      <p:childTnLst>
+                        <p:par>
+                          <p:cTn id="24" fill="hold">
+                            <p:stCondLst>
+                              <p:cond delay="0"/>
+                            </p:stCondLst>
+                            <p:childTnLst>
+                              <p:par>
+                                <p:cTn id="25" presetID="1" presetClass="entr" presetSubtype="0" fill="hold" nodeType="clickEffect">
+                                  <p:stCondLst>
+                                    <p:cond delay="0"/>
+                                  </p:stCondLst>
+                                  <p:childTnLst>
+                                    <p:set>
+                                      <p:cBhvr>
+                                        <p:cTn id="26" dur="1" fill="hold">
+                                          <p:stCondLst>
+                                            <p:cond delay="0"/>
+                                          </p:stCondLst>
+                                        </p:cTn>
+                                        <p:tgtEl>
+                                          <p:spTgt spid="10"/>
+                                        </p:tgtEl>
+                                        <p:attrNameLst>
+                                          <p:attrName>style.visibility</p:attrName>
+                                        </p:attrNameLst>
+                                      </p:cBhvr>
+                                      <p:to>
+                                        <p:strVal val="visible"/>
+                                      </p:to>
+                                    </p:set>
+                                  </p:childTnLst>
+                                </p:cTn>
+                              </p:par>
+                            </p:childTnLst>
+                          </p:cTn>
+                        </p:par>
+                      </p:childTnLst>
+                    </p:cTn>
+                  </p:par>
+                </p:childTnLst>
+              </p:cTn>
+              <p:prevCondLst>
+                <p:cond evt="onPrev" delay="0">
+                  <p:tgtEl>
+                    <p:sldTgt/>
+                  </p:tgtEl>
+                </p:cond>
+              </p:prevCondLst>
+              <p:nextCondLst>
+                <p:cond evt="onNext" delay="0">
+                  <p:tgtEl>
+                    <p:sldTgt/>
+                  </p:tgtEl>
+                </p:cond>
+              </p:nextCondLst>
+            </p:seq>
+          </p:childTnLst>
+        </p:cTn>
+      </p:par>
+    </p:tnLst>
+    <p:bldLst>
+      <p:bldP spid="7" grpId="0" build="p"/>
+    </p:bldLst>
+  </p:timing>
 </p:sld>
 </file>
 
-<file path=ppt/slides/slide17.xml><?xml version="1.0" encoding="utf-8"?>
+<file path=ppt/slides/slide18.xml><?xml version="1.0" encoding="utf-8"?>
 <p:sld xmlns:a="http://schemas.openxmlformats.org/drawingml/2006/main" xmlns:r="http://schemas.openxmlformats.org/officeDocument/2006/relationships" xmlns:p="http://schemas.openxmlformats.org/presentationml/2006/main">
   <p:cSld>
     <p:spTree>
@@ -16022,7 +16746,7 @@
 </p:sld>
 </file>
 
-<file path=ppt/slides/slide18.xml><?xml version="1.0" encoding="utf-8"?>
+<file path=ppt/slides/slide19.xml><?xml version="1.0" encoding="utf-8"?>
 <p:sld xmlns:a="http://schemas.openxmlformats.org/drawingml/2006/main" xmlns:r="http://schemas.openxmlformats.org/officeDocument/2006/relationships" xmlns:p="http://schemas.openxmlformats.org/presentationml/2006/main">
   <p:cSld>
     <p:spTree>
@@ -16439,472 +17163,213 @@
   <p:clrMapOvr>
     <a:masterClrMapping/>
   </p:clrMapOvr>
-</p:sld>
-</file>
-
-<file path=ppt/slides/slide19.xml><?xml version="1.0" encoding="utf-8"?>
-<p:sld xmlns:a="http://schemas.openxmlformats.org/drawingml/2006/main" xmlns:r="http://schemas.openxmlformats.org/officeDocument/2006/relationships" xmlns:p="http://schemas.openxmlformats.org/presentationml/2006/main">
-  <p:cSld>
-    <p:spTree>
-      <p:nvGrpSpPr>
-        <p:cNvPr id="1" name="">
-          <a:extLst>
-            <a:ext uri="{FF2B5EF4-FFF2-40B4-BE49-F238E27FC236}">
-              <a16:creationId xmlns:a16="http://schemas.microsoft.com/office/drawing/2014/main" id="{76BE956D-B085-D969-AA36-92987E61FDFB}"/>
-            </a:ext>
-          </a:extLst>
-        </p:cNvPr>
-        <p:cNvGrpSpPr/>
-        <p:nvPr/>
-      </p:nvGrpSpPr>
-      <p:grpSpPr>
-        <a:xfrm>
-          <a:off x="0" y="0"/>
-          <a:ext cx="0" cy="0"/>
-          <a:chOff x="0" y="0"/>
-          <a:chExt cx="0" cy="0"/>
-        </a:xfrm>
-      </p:grpSpPr>
-      <p:pic>
-        <p:nvPicPr>
-          <p:cNvPr id="10" name="Picture 9">
-            <a:extLst>
-              <a:ext uri="{FF2B5EF4-FFF2-40B4-BE49-F238E27FC236}">
-                <a16:creationId xmlns:a16="http://schemas.microsoft.com/office/drawing/2014/main" id="{A84EB245-D2DB-3065-FA86-053908E4E6AD}"/>
-              </a:ext>
-            </a:extLst>
-          </p:cNvPr>
-          <p:cNvPicPr>
-            <a:picLocks noChangeAspect="1"/>
-          </p:cNvPicPr>
-          <p:nvPr/>
-        </p:nvPicPr>
-        <p:blipFill>
-          <a:blip r:embed="rId3"/>
-          <a:stretch>
-            <a:fillRect/>
-          </a:stretch>
-        </p:blipFill>
-        <p:spPr>
-          <a:xfrm>
-            <a:off x="490654" y="32867"/>
-            <a:ext cx="11456020" cy="6825134"/>
-          </a:xfrm>
-          <a:prstGeom prst="rect">
-            <a:avLst/>
-          </a:prstGeom>
-        </p:spPr>
-      </p:pic>
-      <p:sp>
-        <p:nvSpPr>
-          <p:cNvPr id="12" name="Rectangle 11">
-            <a:extLst>
-              <a:ext uri="{FF2B5EF4-FFF2-40B4-BE49-F238E27FC236}">
-                <a16:creationId xmlns:a16="http://schemas.microsoft.com/office/drawing/2014/main" id="{52070842-3AFA-A1B2-310B-54085B5A3F05}"/>
-              </a:ext>
-            </a:extLst>
-          </p:cNvPr>
-          <p:cNvSpPr/>
-          <p:nvPr/>
-        </p:nvSpPr>
-        <p:spPr>
-          <a:xfrm>
-            <a:off x="1784196" y="2497873"/>
-            <a:ext cx="8976730" cy="680225"/>
-          </a:xfrm>
-          <a:prstGeom prst="rect">
-            <a:avLst/>
-          </a:prstGeom>
-          <a:noFill/>
-          <a:ln w="76200">
-            <a:solidFill>
-              <a:srgbClr val="FF0000"/>
-            </a:solidFill>
-          </a:ln>
-        </p:spPr>
-        <p:style>
-          <a:lnRef idx="2">
-            <a:schemeClr val="accent1">
-              <a:shade val="15000"/>
-            </a:schemeClr>
-          </a:lnRef>
-          <a:fillRef idx="1">
-            <a:schemeClr val="accent1"/>
-          </a:fillRef>
-          <a:effectRef idx="0">
-            <a:schemeClr val="accent1"/>
-          </a:effectRef>
-          <a:fontRef idx="minor">
-            <a:schemeClr val="lt1"/>
-          </a:fontRef>
-        </p:style>
-        <p:txBody>
-          <a:bodyPr rtlCol="0" anchor="ctr"/>
-          <a:lstStyle/>
-          <a:p>
-            <a:pPr algn="ctr"/>
-            <a:endParaRPr lang="en-US"/>
-          </a:p>
-        </p:txBody>
-      </p:sp>
-      <p:sp>
-        <p:nvSpPr>
-          <p:cNvPr id="16" name="TextBox 15">
-            <a:extLst>
-              <a:ext uri="{FF2B5EF4-FFF2-40B4-BE49-F238E27FC236}">
-                <a16:creationId xmlns:a16="http://schemas.microsoft.com/office/drawing/2014/main" id="{EDD17F46-FFFD-FCF7-3FA9-BDCA98AD627A}"/>
-              </a:ext>
-            </a:extLst>
-          </p:cNvPr>
-          <p:cNvSpPr txBox="1"/>
-          <p:nvPr/>
-        </p:nvSpPr>
-        <p:spPr>
-          <a:xfrm>
-            <a:off x="-95151" y="3105834"/>
-            <a:ext cx="1619674" cy="646331"/>
-          </a:xfrm>
-          <a:prstGeom prst="rect">
-            <a:avLst/>
-          </a:prstGeom>
-          <a:noFill/>
-        </p:spPr>
-        <p:txBody>
-          <a:bodyPr wrap="none" rtlCol="0">
-            <a:spAutoFit/>
-          </a:bodyPr>
-          <a:lstStyle/>
-          <a:p>
-            <a:r>
-              <a:rPr lang="en-US" dirty="0"/>
-              <a:t>Rabi relatively </a:t>
-            </a:r>
-          </a:p>
-          <a:p>
-            <a:r>
-              <a:rPr lang="en-US" dirty="0"/>
-              <a:t>small</a:t>
-            </a:r>
-          </a:p>
-        </p:txBody>
-      </p:sp>
-      <p:sp>
-        <p:nvSpPr>
-          <p:cNvPr id="30" name="Rectangle 29">
-            <a:extLst>
-              <a:ext uri="{FF2B5EF4-FFF2-40B4-BE49-F238E27FC236}">
-                <a16:creationId xmlns:a16="http://schemas.microsoft.com/office/drawing/2014/main" id="{10FCB213-F77C-1016-CDCC-7490FE2871C1}"/>
-              </a:ext>
-            </a:extLst>
-          </p:cNvPr>
-          <p:cNvSpPr/>
-          <p:nvPr/>
-        </p:nvSpPr>
-        <p:spPr>
-          <a:xfrm>
-            <a:off x="1784196" y="1318294"/>
-            <a:ext cx="8976730" cy="680225"/>
-          </a:xfrm>
-          <a:prstGeom prst="rect">
-            <a:avLst/>
-          </a:prstGeom>
-          <a:noFill/>
-          <a:ln w="76200">
-            <a:solidFill>
-              <a:schemeClr val="accent1"/>
-            </a:solidFill>
-          </a:ln>
-        </p:spPr>
-        <p:style>
-          <a:lnRef idx="2">
-            <a:schemeClr val="accent1">
-              <a:shade val="15000"/>
-            </a:schemeClr>
-          </a:lnRef>
-          <a:fillRef idx="1">
-            <a:schemeClr val="accent1"/>
-          </a:fillRef>
-          <a:effectRef idx="0">
-            <a:schemeClr val="accent1"/>
-          </a:effectRef>
-          <a:fontRef idx="minor">
-            <a:schemeClr val="lt1"/>
-          </a:fontRef>
-        </p:style>
-        <p:txBody>
-          <a:bodyPr rtlCol="0" anchor="ctr"/>
-          <a:lstStyle/>
-          <a:p>
-            <a:pPr algn="ctr"/>
-            <a:endParaRPr lang="en-US"/>
-          </a:p>
-        </p:txBody>
-      </p:sp>
-      <p:sp>
-        <p:nvSpPr>
-          <p:cNvPr id="34" name="TextBox 33">
-            <a:extLst>
-              <a:ext uri="{FF2B5EF4-FFF2-40B4-BE49-F238E27FC236}">
-                <a16:creationId xmlns:a16="http://schemas.microsoft.com/office/drawing/2014/main" id="{1F1D7ED4-062F-D000-DB74-763E4B300FEA}"/>
-              </a:ext>
-            </a:extLst>
-          </p:cNvPr>
-          <p:cNvSpPr txBox="1"/>
-          <p:nvPr/>
-        </p:nvSpPr>
-        <p:spPr>
-          <a:xfrm>
-            <a:off x="111668" y="1536854"/>
-            <a:ext cx="1206036" cy="923330"/>
-          </a:xfrm>
-          <a:prstGeom prst="rect">
-            <a:avLst/>
-          </a:prstGeom>
-          <a:noFill/>
-        </p:spPr>
-        <p:txBody>
-          <a:bodyPr wrap="none" rtlCol="0">
-            <a:spAutoFit/>
-          </a:bodyPr>
-          <a:lstStyle/>
-          <a:p>
-            <a:r>
-              <a:rPr lang="en-US" dirty="0" err="1"/>
-              <a:t>Ovalau</a:t>
-            </a:r>
-            <a:endParaRPr lang="en-US" dirty="0"/>
-          </a:p>
-          <a:p>
-            <a:r>
-              <a:rPr lang="en-US" dirty="0"/>
-              <a:t>admixed </a:t>
-            </a:r>
-          </a:p>
-          <a:p>
-            <a:r>
-              <a:rPr lang="en-US" dirty="0"/>
-              <a:t>with ghost</a:t>
-            </a:r>
-          </a:p>
-        </p:txBody>
-      </p:sp>
-      <p:sp>
-        <p:nvSpPr>
-          <p:cNvPr id="36" name="Rectangle 35">
-            <a:extLst>
-              <a:ext uri="{FF2B5EF4-FFF2-40B4-BE49-F238E27FC236}">
-                <a16:creationId xmlns:a16="http://schemas.microsoft.com/office/drawing/2014/main" id="{F4018241-4820-CD97-60C1-7670B1DCC6F2}"/>
-              </a:ext>
-            </a:extLst>
-          </p:cNvPr>
-          <p:cNvSpPr/>
-          <p:nvPr/>
-        </p:nvSpPr>
-        <p:spPr>
-          <a:xfrm>
-            <a:off x="1784196" y="635620"/>
-            <a:ext cx="8976731" cy="680225"/>
-          </a:xfrm>
-          <a:prstGeom prst="rect">
-            <a:avLst/>
-          </a:prstGeom>
-          <a:noFill/>
-          <a:ln w="76200">
-            <a:solidFill>
-              <a:schemeClr val="accent6"/>
-            </a:solidFill>
-          </a:ln>
-        </p:spPr>
-        <p:style>
-          <a:lnRef idx="2">
-            <a:schemeClr val="accent1">
-              <a:shade val="15000"/>
-            </a:schemeClr>
-          </a:lnRef>
-          <a:fillRef idx="1">
-            <a:schemeClr val="accent1"/>
-          </a:fillRef>
-          <a:effectRef idx="0">
-            <a:schemeClr val="accent1"/>
-          </a:effectRef>
-          <a:fontRef idx="minor">
-            <a:schemeClr val="lt1"/>
-          </a:fontRef>
-        </p:style>
-        <p:txBody>
-          <a:bodyPr rtlCol="0" anchor="ctr"/>
-          <a:lstStyle/>
-          <a:p>
-            <a:pPr algn="ctr"/>
-            <a:endParaRPr lang="en-US"/>
-          </a:p>
-        </p:txBody>
-      </p:sp>
-      <p:sp>
-        <p:nvSpPr>
-          <p:cNvPr id="40" name="TextBox 39">
-            <a:extLst>
-              <a:ext uri="{FF2B5EF4-FFF2-40B4-BE49-F238E27FC236}">
-                <a16:creationId xmlns:a16="http://schemas.microsoft.com/office/drawing/2014/main" id="{26D54B8E-F776-BD65-33DC-3F671755909C}"/>
-              </a:ext>
-            </a:extLst>
-          </p:cNvPr>
-          <p:cNvSpPr txBox="1"/>
-          <p:nvPr/>
-        </p:nvSpPr>
-        <p:spPr>
-          <a:xfrm>
-            <a:off x="15167" y="392515"/>
-            <a:ext cx="1399037" cy="923330"/>
-          </a:xfrm>
-          <a:prstGeom prst="rect">
-            <a:avLst/>
-          </a:prstGeom>
-          <a:noFill/>
-        </p:spPr>
-        <p:txBody>
-          <a:bodyPr wrap="none" rtlCol="0">
-            <a:spAutoFit/>
-          </a:bodyPr>
-          <a:lstStyle/>
-          <a:p>
-            <a:r>
-              <a:rPr lang="en-US" dirty="0"/>
-              <a:t>Likely &lt;&lt;0.5 </a:t>
-            </a:r>
-          </a:p>
-          <a:p>
-            <a:r>
-              <a:rPr lang="en-US" dirty="0" err="1"/>
-              <a:t>mig</a:t>
-            </a:r>
-            <a:r>
-              <a:rPr lang="en-US" dirty="0"/>
-              <a:t>/gen</a:t>
-            </a:r>
-          </a:p>
-          <a:p>
-            <a:r>
-              <a:rPr lang="en-US" dirty="0"/>
-              <a:t> to Kadavu</a:t>
-            </a:r>
-          </a:p>
-        </p:txBody>
-      </p:sp>
-      <p:sp>
-        <p:nvSpPr>
-          <p:cNvPr id="42" name="Rectangle 41">
-            <a:extLst>
-              <a:ext uri="{FF2B5EF4-FFF2-40B4-BE49-F238E27FC236}">
-                <a16:creationId xmlns:a16="http://schemas.microsoft.com/office/drawing/2014/main" id="{04B82716-580D-03A9-0B92-BC84E187549E}"/>
-              </a:ext>
-            </a:extLst>
-          </p:cNvPr>
-          <p:cNvSpPr/>
-          <p:nvPr/>
-        </p:nvSpPr>
-        <p:spPr>
-          <a:xfrm>
-            <a:off x="1784196" y="4886014"/>
-            <a:ext cx="8976730" cy="680225"/>
-          </a:xfrm>
-          <a:prstGeom prst="rect">
-            <a:avLst/>
-          </a:prstGeom>
-          <a:noFill/>
-          <a:ln w="76200">
-            <a:solidFill>
-              <a:srgbClr val="FFC000"/>
-            </a:solidFill>
-          </a:ln>
-        </p:spPr>
-        <p:style>
-          <a:lnRef idx="2">
-            <a:schemeClr val="accent1">
-              <a:shade val="15000"/>
-            </a:schemeClr>
-          </a:lnRef>
-          <a:fillRef idx="1">
-            <a:schemeClr val="accent1"/>
-          </a:fillRef>
-          <a:effectRef idx="0">
-            <a:schemeClr val="accent1"/>
-          </a:effectRef>
-          <a:fontRef idx="minor">
-            <a:schemeClr val="lt1"/>
-          </a:fontRef>
-        </p:style>
-        <p:txBody>
-          <a:bodyPr rtlCol="0" anchor="ctr"/>
-          <a:lstStyle/>
-          <a:p>
-            <a:pPr algn="ctr"/>
-            <a:endParaRPr lang="en-US"/>
-          </a:p>
-        </p:txBody>
-      </p:sp>
-      <p:sp>
-        <p:nvSpPr>
-          <p:cNvPr id="44" name="TextBox 43">
-            <a:extLst>
-              <a:ext uri="{FF2B5EF4-FFF2-40B4-BE49-F238E27FC236}">
-                <a16:creationId xmlns:a16="http://schemas.microsoft.com/office/drawing/2014/main" id="{43A193D6-2A5D-C7A5-EF31-425C8F13D8FE}"/>
-              </a:ext>
-            </a:extLst>
-          </p:cNvPr>
-          <p:cNvSpPr txBox="1"/>
-          <p:nvPr/>
-        </p:nvSpPr>
-        <p:spPr>
-          <a:xfrm>
-            <a:off x="-68611" y="4886014"/>
-            <a:ext cx="1020151" cy="923330"/>
-          </a:xfrm>
-          <a:prstGeom prst="rect">
-            <a:avLst/>
-          </a:prstGeom>
-          <a:noFill/>
-        </p:spPr>
-        <p:txBody>
-          <a:bodyPr wrap="none" rtlCol="0">
-            <a:spAutoFit/>
-          </a:bodyPr>
-          <a:lstStyle/>
-          <a:p>
-            <a:r>
-              <a:rPr lang="en-US" dirty="0"/>
-              <a:t>Viti </a:t>
-            </a:r>
-            <a:r>
-              <a:rPr lang="en-US" dirty="0" err="1"/>
-              <a:t>Levu</a:t>
-            </a:r>
-            <a:endParaRPr lang="en-US" dirty="0"/>
-          </a:p>
-          <a:p>
-            <a:r>
-              <a:rPr lang="en-US" dirty="0"/>
-              <a:t>founder</a:t>
-            </a:r>
-          </a:p>
-          <a:p>
-            <a:r>
-              <a:rPr lang="en-US" dirty="0"/>
-              <a:t>effect</a:t>
-            </a:r>
-          </a:p>
-        </p:txBody>
-      </p:sp>
-    </p:spTree>
-    <p:extLst>
-      <p:ext uri="{BB962C8B-B14F-4D97-AF65-F5344CB8AC3E}">
-        <p14:creationId xmlns:p14="http://schemas.microsoft.com/office/powerpoint/2010/main" val="3552528001"/>
-      </p:ext>
-    </p:extLst>
-  </p:cSld>
-  <p:clrMapOvr>
-    <a:masterClrMapping/>
-  </p:clrMapOvr>
+  <p:timing>
+    <p:tnLst>
+      <p:par>
+        <p:cTn id="1" dur="indefinite" restart="never" nodeType="tmRoot">
+          <p:childTnLst>
+            <p:seq concurrent="1" nextAc="seek">
+              <p:cTn id="2" dur="indefinite" nodeType="mainSeq">
+                <p:childTnLst>
+                  <p:par>
+                    <p:cTn id="3" fill="hold">
+                      <p:stCondLst>
+                        <p:cond delay="indefinite"/>
+                      </p:stCondLst>
+                      <p:childTnLst>
+                        <p:par>
+                          <p:cTn id="4" fill="hold">
+                            <p:stCondLst>
+                              <p:cond delay="0"/>
+                            </p:stCondLst>
+                            <p:childTnLst>
+                              <p:par>
+                                <p:cTn id="5" presetID="1" presetClass="entr" presetSubtype="0" fill="hold" grpId="0" nodeType="clickEffect">
+                                  <p:stCondLst>
+                                    <p:cond delay="0"/>
+                                  </p:stCondLst>
+                                  <p:childTnLst>
+                                    <p:set>
+                                      <p:cBhvr>
+                                        <p:cTn id="6" dur="1" fill="hold">
+                                          <p:stCondLst>
+                                            <p:cond delay="0"/>
+                                          </p:stCondLst>
+                                        </p:cTn>
+                                        <p:tgtEl>
+                                          <p:spTgt spid="5">
+                                            <p:txEl>
+                                              <p:pRg st="0" end="0"/>
+                                            </p:txEl>
+                                          </p:spTgt>
+                                        </p:tgtEl>
+                                        <p:attrNameLst>
+                                          <p:attrName>style.visibility</p:attrName>
+                                        </p:attrNameLst>
+                                      </p:cBhvr>
+                                      <p:to>
+                                        <p:strVal val="visible"/>
+                                      </p:to>
+                                    </p:set>
+                                  </p:childTnLst>
+                                </p:cTn>
+                              </p:par>
+                              <p:par>
+                                <p:cTn id="7" presetID="1" presetClass="entr" presetSubtype="0" fill="hold" nodeType="withEffect">
+                                  <p:stCondLst>
+                                    <p:cond delay="0"/>
+                                  </p:stCondLst>
+                                  <p:childTnLst>
+                                    <p:set>
+                                      <p:cBhvr>
+                                        <p:cTn id="8" dur="1" fill="hold">
+                                          <p:stCondLst>
+                                            <p:cond delay="0"/>
+                                          </p:stCondLst>
+                                        </p:cTn>
+                                        <p:tgtEl>
+                                          <p:spTgt spid="13"/>
+                                        </p:tgtEl>
+                                        <p:attrNameLst>
+                                          <p:attrName>style.visibility</p:attrName>
+                                        </p:attrNameLst>
+                                      </p:cBhvr>
+                                      <p:to>
+                                        <p:strVal val="visible"/>
+                                      </p:to>
+                                    </p:set>
+                                  </p:childTnLst>
+                                </p:cTn>
+                              </p:par>
+                            </p:childTnLst>
+                          </p:cTn>
+                        </p:par>
+                      </p:childTnLst>
+                    </p:cTn>
+                  </p:par>
+                  <p:par>
+                    <p:cTn id="9" fill="hold">
+                      <p:stCondLst>
+                        <p:cond delay="indefinite"/>
+                      </p:stCondLst>
+                      <p:childTnLst>
+                        <p:par>
+                          <p:cTn id="10" fill="hold">
+                            <p:stCondLst>
+                              <p:cond delay="0"/>
+                            </p:stCondLst>
+                            <p:childTnLst>
+                              <p:par>
+                                <p:cTn id="11" presetID="1" presetClass="entr" presetSubtype="0" fill="hold" grpId="0" nodeType="clickEffect">
+                                  <p:stCondLst>
+                                    <p:cond delay="0"/>
+                                  </p:stCondLst>
+                                  <p:childTnLst>
+                                    <p:set>
+                                      <p:cBhvr>
+                                        <p:cTn id="12" dur="1" fill="hold">
+                                          <p:stCondLst>
+                                            <p:cond delay="0"/>
+                                          </p:stCondLst>
+                                        </p:cTn>
+                                        <p:tgtEl>
+                                          <p:spTgt spid="5">
+                                            <p:txEl>
+                                              <p:pRg st="1" end="1"/>
+                                            </p:txEl>
+                                          </p:spTgt>
+                                        </p:tgtEl>
+                                        <p:attrNameLst>
+                                          <p:attrName>style.visibility</p:attrName>
+                                        </p:attrNameLst>
+                                      </p:cBhvr>
+                                      <p:to>
+                                        <p:strVal val="visible"/>
+                                      </p:to>
+                                    </p:set>
+                                  </p:childTnLst>
+                                </p:cTn>
+                              </p:par>
+                            </p:childTnLst>
+                          </p:cTn>
+                        </p:par>
+                      </p:childTnLst>
+                    </p:cTn>
+                  </p:par>
+                  <p:par>
+                    <p:cTn id="13" fill="hold">
+                      <p:stCondLst>
+                        <p:cond delay="indefinite"/>
+                      </p:stCondLst>
+                      <p:childTnLst>
+                        <p:par>
+                          <p:cTn id="14" fill="hold">
+                            <p:stCondLst>
+                              <p:cond delay="0"/>
+                            </p:stCondLst>
+                            <p:childTnLst>
+                              <p:par>
+                                <p:cTn id="15" presetID="1" presetClass="entr" presetSubtype="0" fill="hold" grpId="0" nodeType="clickEffect">
+                                  <p:stCondLst>
+                                    <p:cond delay="0"/>
+                                  </p:stCondLst>
+                                  <p:childTnLst>
+                                    <p:set>
+                                      <p:cBhvr>
+                                        <p:cTn id="16" dur="1" fill="hold">
+                                          <p:stCondLst>
+                                            <p:cond delay="0"/>
+                                          </p:stCondLst>
+                                        </p:cTn>
+                                        <p:tgtEl>
+                                          <p:spTgt spid="5">
+                                            <p:txEl>
+                                              <p:pRg st="2" end="2"/>
+                                            </p:txEl>
+                                          </p:spTgt>
+                                        </p:tgtEl>
+                                        <p:attrNameLst>
+                                          <p:attrName>style.visibility</p:attrName>
+                                        </p:attrNameLst>
+                                      </p:cBhvr>
+                                      <p:to>
+                                        <p:strVal val="visible"/>
+                                      </p:to>
+                                    </p:set>
+                                  </p:childTnLst>
+                                </p:cTn>
+                              </p:par>
+                            </p:childTnLst>
+                          </p:cTn>
+                        </p:par>
+                      </p:childTnLst>
+                    </p:cTn>
+                  </p:par>
+                </p:childTnLst>
+              </p:cTn>
+              <p:prevCondLst>
+                <p:cond evt="onPrev" delay="0">
+                  <p:tgtEl>
+                    <p:sldTgt/>
+                  </p:tgtEl>
+                </p:cond>
+              </p:prevCondLst>
+              <p:nextCondLst>
+                <p:cond evt="onNext" delay="0">
+                  <p:tgtEl>
+                    <p:sldTgt/>
+                  </p:tgtEl>
+                </p:cond>
+              </p:nextCondLst>
+            </p:seq>
+          </p:childTnLst>
+        </p:cTn>
+      </p:par>
+    </p:tnLst>
+    <p:bldLst>
+      <p:bldP spid="5" grpId="0" uiExpand="1" build="p"/>
+    </p:bldLst>
+  </p:timing>
 </p:sld>
 </file>
 
@@ -17346,6 +17811,800 @@
 </p:sld>
 </file>
 
+<file path=ppt/slides/slide20.xml><?xml version="1.0" encoding="utf-8"?>
+<p:sld xmlns:a="http://schemas.openxmlformats.org/drawingml/2006/main" xmlns:r="http://schemas.openxmlformats.org/officeDocument/2006/relationships" xmlns:p="http://schemas.openxmlformats.org/presentationml/2006/main">
+  <p:cSld>
+    <p:spTree>
+      <p:nvGrpSpPr>
+        <p:cNvPr id="1" name="">
+          <a:extLst>
+            <a:ext uri="{FF2B5EF4-FFF2-40B4-BE49-F238E27FC236}">
+              <a16:creationId xmlns:a16="http://schemas.microsoft.com/office/drawing/2014/main" id="{76BE956D-B085-D969-AA36-92987E61FDFB}"/>
+            </a:ext>
+          </a:extLst>
+        </p:cNvPr>
+        <p:cNvGrpSpPr/>
+        <p:nvPr/>
+      </p:nvGrpSpPr>
+      <p:grpSpPr>
+        <a:xfrm>
+          <a:off x="0" y="0"/>
+          <a:ext cx="0" cy="0"/>
+          <a:chOff x="0" y="0"/>
+          <a:chExt cx="0" cy="0"/>
+        </a:xfrm>
+      </p:grpSpPr>
+      <p:pic>
+        <p:nvPicPr>
+          <p:cNvPr id="10" name="Picture 9">
+            <a:extLst>
+              <a:ext uri="{FF2B5EF4-FFF2-40B4-BE49-F238E27FC236}">
+                <a16:creationId xmlns:a16="http://schemas.microsoft.com/office/drawing/2014/main" id="{A84EB245-D2DB-3065-FA86-053908E4E6AD}"/>
+              </a:ext>
+            </a:extLst>
+          </p:cNvPr>
+          <p:cNvPicPr>
+            <a:picLocks noChangeAspect="1"/>
+          </p:cNvPicPr>
+          <p:nvPr/>
+        </p:nvPicPr>
+        <p:blipFill>
+          <a:blip r:embed="rId3"/>
+          <a:stretch>
+            <a:fillRect/>
+          </a:stretch>
+        </p:blipFill>
+        <p:spPr>
+          <a:xfrm>
+            <a:off x="490654" y="32867"/>
+            <a:ext cx="11456020" cy="6825134"/>
+          </a:xfrm>
+          <a:prstGeom prst="rect">
+            <a:avLst/>
+          </a:prstGeom>
+        </p:spPr>
+      </p:pic>
+      <p:sp>
+        <p:nvSpPr>
+          <p:cNvPr id="12" name="Rectangle 11">
+            <a:extLst>
+              <a:ext uri="{FF2B5EF4-FFF2-40B4-BE49-F238E27FC236}">
+                <a16:creationId xmlns:a16="http://schemas.microsoft.com/office/drawing/2014/main" id="{52070842-3AFA-A1B2-310B-54085B5A3F05}"/>
+              </a:ext>
+            </a:extLst>
+          </p:cNvPr>
+          <p:cNvSpPr/>
+          <p:nvPr/>
+        </p:nvSpPr>
+        <p:spPr>
+          <a:xfrm>
+            <a:off x="1784196" y="2497873"/>
+            <a:ext cx="8976730" cy="680225"/>
+          </a:xfrm>
+          <a:prstGeom prst="rect">
+            <a:avLst/>
+          </a:prstGeom>
+          <a:noFill/>
+          <a:ln w="76200">
+            <a:solidFill>
+              <a:srgbClr val="FF0000"/>
+            </a:solidFill>
+          </a:ln>
+        </p:spPr>
+        <p:style>
+          <a:lnRef idx="2">
+            <a:schemeClr val="accent1">
+              <a:shade val="15000"/>
+            </a:schemeClr>
+          </a:lnRef>
+          <a:fillRef idx="1">
+            <a:schemeClr val="accent1"/>
+          </a:fillRef>
+          <a:effectRef idx="0">
+            <a:schemeClr val="accent1"/>
+          </a:effectRef>
+          <a:fontRef idx="minor">
+            <a:schemeClr val="lt1"/>
+          </a:fontRef>
+        </p:style>
+        <p:txBody>
+          <a:bodyPr rtlCol="0" anchor="ctr"/>
+          <a:lstStyle/>
+          <a:p>
+            <a:pPr algn="ctr"/>
+            <a:endParaRPr lang="en-US"/>
+          </a:p>
+        </p:txBody>
+      </p:sp>
+      <p:sp>
+        <p:nvSpPr>
+          <p:cNvPr id="16" name="TextBox 15">
+            <a:extLst>
+              <a:ext uri="{FF2B5EF4-FFF2-40B4-BE49-F238E27FC236}">
+                <a16:creationId xmlns:a16="http://schemas.microsoft.com/office/drawing/2014/main" id="{EDD17F46-FFFD-FCF7-3FA9-BDCA98AD627A}"/>
+              </a:ext>
+            </a:extLst>
+          </p:cNvPr>
+          <p:cNvSpPr txBox="1"/>
+          <p:nvPr/>
+        </p:nvSpPr>
+        <p:spPr>
+          <a:xfrm>
+            <a:off x="-95151" y="3105834"/>
+            <a:ext cx="1619674" cy="646331"/>
+          </a:xfrm>
+          <a:prstGeom prst="rect">
+            <a:avLst/>
+          </a:prstGeom>
+          <a:noFill/>
+        </p:spPr>
+        <p:txBody>
+          <a:bodyPr wrap="none" rtlCol="0">
+            <a:spAutoFit/>
+          </a:bodyPr>
+          <a:lstStyle/>
+          <a:p>
+            <a:r>
+              <a:rPr lang="en-US" dirty="0"/>
+              <a:t>Rabi relatively </a:t>
+            </a:r>
+          </a:p>
+          <a:p>
+            <a:r>
+              <a:rPr lang="en-US" dirty="0"/>
+              <a:t>small</a:t>
+            </a:r>
+          </a:p>
+        </p:txBody>
+      </p:sp>
+      <p:sp>
+        <p:nvSpPr>
+          <p:cNvPr id="30" name="Rectangle 29">
+            <a:extLst>
+              <a:ext uri="{FF2B5EF4-FFF2-40B4-BE49-F238E27FC236}">
+                <a16:creationId xmlns:a16="http://schemas.microsoft.com/office/drawing/2014/main" id="{10FCB213-F77C-1016-CDCC-7490FE2871C1}"/>
+              </a:ext>
+            </a:extLst>
+          </p:cNvPr>
+          <p:cNvSpPr/>
+          <p:nvPr/>
+        </p:nvSpPr>
+        <p:spPr>
+          <a:xfrm>
+            <a:off x="1784196" y="1318294"/>
+            <a:ext cx="8976730" cy="680225"/>
+          </a:xfrm>
+          <a:prstGeom prst="rect">
+            <a:avLst/>
+          </a:prstGeom>
+          <a:noFill/>
+          <a:ln w="76200">
+            <a:solidFill>
+              <a:schemeClr val="accent1"/>
+            </a:solidFill>
+          </a:ln>
+        </p:spPr>
+        <p:style>
+          <a:lnRef idx="2">
+            <a:schemeClr val="accent1">
+              <a:shade val="15000"/>
+            </a:schemeClr>
+          </a:lnRef>
+          <a:fillRef idx="1">
+            <a:schemeClr val="accent1"/>
+          </a:fillRef>
+          <a:effectRef idx="0">
+            <a:schemeClr val="accent1"/>
+          </a:effectRef>
+          <a:fontRef idx="minor">
+            <a:schemeClr val="lt1"/>
+          </a:fontRef>
+        </p:style>
+        <p:txBody>
+          <a:bodyPr rtlCol="0" anchor="ctr"/>
+          <a:lstStyle/>
+          <a:p>
+            <a:pPr algn="ctr"/>
+            <a:endParaRPr lang="en-US"/>
+          </a:p>
+        </p:txBody>
+      </p:sp>
+      <p:sp>
+        <p:nvSpPr>
+          <p:cNvPr id="34" name="TextBox 33">
+            <a:extLst>
+              <a:ext uri="{FF2B5EF4-FFF2-40B4-BE49-F238E27FC236}">
+                <a16:creationId xmlns:a16="http://schemas.microsoft.com/office/drawing/2014/main" id="{1F1D7ED4-062F-D000-DB74-763E4B300FEA}"/>
+              </a:ext>
+            </a:extLst>
+          </p:cNvPr>
+          <p:cNvSpPr txBox="1"/>
+          <p:nvPr/>
+        </p:nvSpPr>
+        <p:spPr>
+          <a:xfrm>
+            <a:off x="111668" y="1536854"/>
+            <a:ext cx="1206036" cy="923330"/>
+          </a:xfrm>
+          <a:prstGeom prst="rect">
+            <a:avLst/>
+          </a:prstGeom>
+          <a:noFill/>
+        </p:spPr>
+        <p:txBody>
+          <a:bodyPr wrap="none" rtlCol="0">
+            <a:spAutoFit/>
+          </a:bodyPr>
+          <a:lstStyle/>
+          <a:p>
+            <a:r>
+              <a:rPr lang="en-US" dirty="0" err="1"/>
+              <a:t>Ovalau</a:t>
+            </a:r>
+            <a:endParaRPr lang="en-US" dirty="0"/>
+          </a:p>
+          <a:p>
+            <a:r>
+              <a:rPr lang="en-US" dirty="0"/>
+              <a:t>admixed </a:t>
+            </a:r>
+          </a:p>
+          <a:p>
+            <a:r>
+              <a:rPr lang="en-US" dirty="0"/>
+              <a:t>with ghost</a:t>
+            </a:r>
+          </a:p>
+        </p:txBody>
+      </p:sp>
+      <p:sp>
+        <p:nvSpPr>
+          <p:cNvPr id="36" name="Rectangle 35">
+            <a:extLst>
+              <a:ext uri="{FF2B5EF4-FFF2-40B4-BE49-F238E27FC236}">
+                <a16:creationId xmlns:a16="http://schemas.microsoft.com/office/drawing/2014/main" id="{F4018241-4820-CD97-60C1-7670B1DCC6F2}"/>
+              </a:ext>
+            </a:extLst>
+          </p:cNvPr>
+          <p:cNvSpPr/>
+          <p:nvPr/>
+        </p:nvSpPr>
+        <p:spPr>
+          <a:xfrm>
+            <a:off x="1784196" y="635620"/>
+            <a:ext cx="8976731" cy="680225"/>
+          </a:xfrm>
+          <a:prstGeom prst="rect">
+            <a:avLst/>
+          </a:prstGeom>
+          <a:noFill/>
+          <a:ln w="76200">
+            <a:solidFill>
+              <a:schemeClr val="accent6"/>
+            </a:solidFill>
+          </a:ln>
+        </p:spPr>
+        <p:style>
+          <a:lnRef idx="2">
+            <a:schemeClr val="accent1">
+              <a:shade val="15000"/>
+            </a:schemeClr>
+          </a:lnRef>
+          <a:fillRef idx="1">
+            <a:schemeClr val="accent1"/>
+          </a:fillRef>
+          <a:effectRef idx="0">
+            <a:schemeClr val="accent1"/>
+          </a:effectRef>
+          <a:fontRef idx="minor">
+            <a:schemeClr val="lt1"/>
+          </a:fontRef>
+        </p:style>
+        <p:txBody>
+          <a:bodyPr rtlCol="0" anchor="ctr"/>
+          <a:lstStyle/>
+          <a:p>
+            <a:pPr algn="ctr"/>
+            <a:endParaRPr lang="en-US"/>
+          </a:p>
+        </p:txBody>
+      </p:sp>
+      <p:sp>
+        <p:nvSpPr>
+          <p:cNvPr id="40" name="TextBox 39">
+            <a:extLst>
+              <a:ext uri="{FF2B5EF4-FFF2-40B4-BE49-F238E27FC236}">
+                <a16:creationId xmlns:a16="http://schemas.microsoft.com/office/drawing/2014/main" id="{26D54B8E-F776-BD65-33DC-3F671755909C}"/>
+              </a:ext>
+            </a:extLst>
+          </p:cNvPr>
+          <p:cNvSpPr txBox="1"/>
+          <p:nvPr/>
+        </p:nvSpPr>
+        <p:spPr>
+          <a:xfrm>
+            <a:off x="15167" y="392515"/>
+            <a:ext cx="1399037" cy="923330"/>
+          </a:xfrm>
+          <a:prstGeom prst="rect">
+            <a:avLst/>
+          </a:prstGeom>
+          <a:noFill/>
+        </p:spPr>
+        <p:txBody>
+          <a:bodyPr wrap="none" rtlCol="0">
+            <a:spAutoFit/>
+          </a:bodyPr>
+          <a:lstStyle/>
+          <a:p>
+            <a:r>
+              <a:rPr lang="en-US" dirty="0"/>
+              <a:t>Likely &lt;&lt;0.5 </a:t>
+            </a:r>
+          </a:p>
+          <a:p>
+            <a:r>
+              <a:rPr lang="en-US" dirty="0" err="1"/>
+              <a:t>mig</a:t>
+            </a:r>
+            <a:r>
+              <a:rPr lang="en-US" dirty="0"/>
+              <a:t>/gen</a:t>
+            </a:r>
+          </a:p>
+          <a:p>
+            <a:r>
+              <a:rPr lang="en-US" dirty="0"/>
+              <a:t> to Kadavu</a:t>
+            </a:r>
+          </a:p>
+        </p:txBody>
+      </p:sp>
+      <p:sp>
+        <p:nvSpPr>
+          <p:cNvPr id="42" name="Rectangle 41">
+            <a:extLst>
+              <a:ext uri="{FF2B5EF4-FFF2-40B4-BE49-F238E27FC236}">
+                <a16:creationId xmlns:a16="http://schemas.microsoft.com/office/drawing/2014/main" id="{04B82716-580D-03A9-0B92-BC84E187549E}"/>
+              </a:ext>
+            </a:extLst>
+          </p:cNvPr>
+          <p:cNvSpPr/>
+          <p:nvPr/>
+        </p:nvSpPr>
+        <p:spPr>
+          <a:xfrm>
+            <a:off x="1784196" y="4886014"/>
+            <a:ext cx="8976730" cy="680225"/>
+          </a:xfrm>
+          <a:prstGeom prst="rect">
+            <a:avLst/>
+          </a:prstGeom>
+          <a:noFill/>
+          <a:ln w="76200">
+            <a:solidFill>
+              <a:srgbClr val="FFC000"/>
+            </a:solidFill>
+          </a:ln>
+        </p:spPr>
+        <p:style>
+          <a:lnRef idx="2">
+            <a:schemeClr val="accent1">
+              <a:shade val="15000"/>
+            </a:schemeClr>
+          </a:lnRef>
+          <a:fillRef idx="1">
+            <a:schemeClr val="accent1"/>
+          </a:fillRef>
+          <a:effectRef idx="0">
+            <a:schemeClr val="accent1"/>
+          </a:effectRef>
+          <a:fontRef idx="minor">
+            <a:schemeClr val="lt1"/>
+          </a:fontRef>
+        </p:style>
+        <p:txBody>
+          <a:bodyPr rtlCol="0" anchor="ctr"/>
+          <a:lstStyle/>
+          <a:p>
+            <a:pPr algn="ctr"/>
+            <a:endParaRPr lang="en-US"/>
+          </a:p>
+        </p:txBody>
+      </p:sp>
+      <p:sp>
+        <p:nvSpPr>
+          <p:cNvPr id="44" name="TextBox 43">
+            <a:extLst>
+              <a:ext uri="{FF2B5EF4-FFF2-40B4-BE49-F238E27FC236}">
+                <a16:creationId xmlns:a16="http://schemas.microsoft.com/office/drawing/2014/main" id="{43A193D6-2A5D-C7A5-EF31-425C8F13D8FE}"/>
+              </a:ext>
+            </a:extLst>
+          </p:cNvPr>
+          <p:cNvSpPr txBox="1"/>
+          <p:nvPr/>
+        </p:nvSpPr>
+        <p:spPr>
+          <a:xfrm>
+            <a:off x="-68611" y="4886014"/>
+            <a:ext cx="1020151" cy="923330"/>
+          </a:xfrm>
+          <a:prstGeom prst="rect">
+            <a:avLst/>
+          </a:prstGeom>
+          <a:noFill/>
+        </p:spPr>
+        <p:txBody>
+          <a:bodyPr wrap="none" rtlCol="0">
+            <a:spAutoFit/>
+          </a:bodyPr>
+          <a:lstStyle/>
+          <a:p>
+            <a:r>
+              <a:rPr lang="en-US" dirty="0"/>
+              <a:t>Viti </a:t>
+            </a:r>
+            <a:r>
+              <a:rPr lang="en-US" dirty="0" err="1"/>
+              <a:t>Levu</a:t>
+            </a:r>
+            <a:endParaRPr lang="en-US" dirty="0"/>
+          </a:p>
+          <a:p>
+            <a:r>
+              <a:rPr lang="en-US" dirty="0"/>
+              <a:t>founder</a:t>
+            </a:r>
+          </a:p>
+          <a:p>
+            <a:r>
+              <a:rPr lang="en-US" dirty="0"/>
+              <a:t>effect</a:t>
+            </a:r>
+          </a:p>
+        </p:txBody>
+      </p:sp>
+    </p:spTree>
+    <p:extLst>
+      <p:ext uri="{BB962C8B-B14F-4D97-AF65-F5344CB8AC3E}">
+        <p14:creationId xmlns:p14="http://schemas.microsoft.com/office/powerpoint/2010/main" val="3552528001"/>
+      </p:ext>
+    </p:extLst>
+  </p:cSld>
+  <p:clrMapOvr>
+    <a:masterClrMapping/>
+  </p:clrMapOvr>
+  <p:timing>
+    <p:tnLst>
+      <p:par>
+        <p:cTn id="1" dur="indefinite" restart="never" nodeType="tmRoot">
+          <p:childTnLst>
+            <p:seq concurrent="1" nextAc="seek">
+              <p:cTn id="2" dur="indefinite" nodeType="mainSeq">
+                <p:childTnLst>
+                  <p:par>
+                    <p:cTn id="3" fill="hold">
+                      <p:stCondLst>
+                        <p:cond delay="indefinite"/>
+                      </p:stCondLst>
+                      <p:childTnLst>
+                        <p:par>
+                          <p:cTn id="4" fill="hold">
+                            <p:stCondLst>
+                              <p:cond delay="0"/>
+                            </p:stCondLst>
+                            <p:childTnLst>
+                              <p:par>
+                                <p:cTn id="5" presetID="1" presetClass="entr" presetSubtype="0" fill="hold" grpId="0" nodeType="clickEffect">
+                                  <p:stCondLst>
+                                    <p:cond delay="0"/>
+                                  </p:stCondLst>
+                                  <p:childTnLst>
+                                    <p:set>
+                                      <p:cBhvr>
+                                        <p:cTn id="6" dur="1" fill="hold">
+                                          <p:stCondLst>
+                                            <p:cond delay="0"/>
+                                          </p:stCondLst>
+                                        </p:cTn>
+                                        <p:tgtEl>
+                                          <p:spTgt spid="40"/>
+                                        </p:tgtEl>
+                                        <p:attrNameLst>
+                                          <p:attrName>style.visibility</p:attrName>
+                                        </p:attrNameLst>
+                                      </p:cBhvr>
+                                      <p:to>
+                                        <p:strVal val="visible"/>
+                                      </p:to>
+                                    </p:set>
+                                  </p:childTnLst>
+                                </p:cTn>
+                              </p:par>
+                              <p:par>
+                                <p:cTn id="7" presetID="1" presetClass="entr" presetSubtype="0" fill="hold" grpId="0" nodeType="withEffect">
+                                  <p:stCondLst>
+                                    <p:cond delay="0"/>
+                                  </p:stCondLst>
+                                  <p:childTnLst>
+                                    <p:set>
+                                      <p:cBhvr>
+                                        <p:cTn id="8" dur="1" fill="hold">
+                                          <p:stCondLst>
+                                            <p:cond delay="0"/>
+                                          </p:stCondLst>
+                                        </p:cTn>
+                                        <p:tgtEl>
+                                          <p:spTgt spid="36"/>
+                                        </p:tgtEl>
+                                        <p:attrNameLst>
+                                          <p:attrName>style.visibility</p:attrName>
+                                        </p:attrNameLst>
+                                      </p:cBhvr>
+                                      <p:to>
+                                        <p:strVal val="visible"/>
+                                      </p:to>
+                                    </p:set>
+                                  </p:childTnLst>
+                                </p:cTn>
+                              </p:par>
+                            </p:childTnLst>
+                          </p:cTn>
+                        </p:par>
+                      </p:childTnLst>
+                    </p:cTn>
+                  </p:par>
+                  <p:par>
+                    <p:cTn id="9" fill="hold">
+                      <p:stCondLst>
+                        <p:cond delay="indefinite"/>
+                      </p:stCondLst>
+                      <p:childTnLst>
+                        <p:par>
+                          <p:cTn id="10" fill="hold">
+                            <p:stCondLst>
+                              <p:cond delay="0"/>
+                            </p:stCondLst>
+                            <p:childTnLst>
+                              <p:par>
+                                <p:cTn id="11" presetID="1" presetClass="entr" presetSubtype="0" fill="hold" grpId="0" nodeType="clickEffect">
+                                  <p:stCondLst>
+                                    <p:cond delay="0"/>
+                                  </p:stCondLst>
+                                  <p:childTnLst>
+                                    <p:set>
+                                      <p:cBhvr>
+                                        <p:cTn id="12" dur="1" fill="hold">
+                                          <p:stCondLst>
+                                            <p:cond delay="0"/>
+                                          </p:stCondLst>
+                                        </p:cTn>
+                                        <p:tgtEl>
+                                          <p:spTgt spid="34"/>
+                                        </p:tgtEl>
+                                        <p:attrNameLst>
+                                          <p:attrName>style.visibility</p:attrName>
+                                        </p:attrNameLst>
+                                      </p:cBhvr>
+                                      <p:to>
+                                        <p:strVal val="visible"/>
+                                      </p:to>
+                                    </p:set>
+                                  </p:childTnLst>
+                                </p:cTn>
+                              </p:par>
+                              <p:par>
+                                <p:cTn id="13" presetID="1" presetClass="entr" presetSubtype="0" fill="hold" grpId="0" nodeType="withEffect">
+                                  <p:stCondLst>
+                                    <p:cond delay="0"/>
+                                  </p:stCondLst>
+                                  <p:childTnLst>
+                                    <p:set>
+                                      <p:cBhvr>
+                                        <p:cTn id="14" dur="1" fill="hold">
+                                          <p:stCondLst>
+                                            <p:cond delay="0"/>
+                                          </p:stCondLst>
+                                        </p:cTn>
+                                        <p:tgtEl>
+                                          <p:spTgt spid="30"/>
+                                        </p:tgtEl>
+                                        <p:attrNameLst>
+                                          <p:attrName>style.visibility</p:attrName>
+                                        </p:attrNameLst>
+                                      </p:cBhvr>
+                                      <p:to>
+                                        <p:strVal val="visible"/>
+                                      </p:to>
+                                    </p:set>
+                                  </p:childTnLst>
+                                </p:cTn>
+                              </p:par>
+                            </p:childTnLst>
+                          </p:cTn>
+                        </p:par>
+                      </p:childTnLst>
+                    </p:cTn>
+                  </p:par>
+                  <p:par>
+                    <p:cTn id="15" fill="hold">
+                      <p:stCondLst>
+                        <p:cond delay="indefinite"/>
+                      </p:stCondLst>
+                      <p:childTnLst>
+                        <p:par>
+                          <p:cTn id="16" fill="hold">
+                            <p:stCondLst>
+                              <p:cond delay="0"/>
+                            </p:stCondLst>
+                            <p:childTnLst>
+                              <p:par>
+                                <p:cTn id="17" presetID="1" presetClass="entr" presetSubtype="0" fill="hold" grpId="0" nodeType="clickEffect">
+                                  <p:stCondLst>
+                                    <p:cond delay="0"/>
+                                  </p:stCondLst>
+                                  <p:childTnLst>
+                                    <p:set>
+                                      <p:cBhvr>
+                                        <p:cTn id="18" dur="1" fill="hold">
+                                          <p:stCondLst>
+                                            <p:cond delay="0"/>
+                                          </p:stCondLst>
+                                        </p:cTn>
+                                        <p:tgtEl>
+                                          <p:spTgt spid="16"/>
+                                        </p:tgtEl>
+                                        <p:attrNameLst>
+                                          <p:attrName>style.visibility</p:attrName>
+                                        </p:attrNameLst>
+                                      </p:cBhvr>
+                                      <p:to>
+                                        <p:strVal val="visible"/>
+                                      </p:to>
+                                    </p:set>
+                                  </p:childTnLst>
+                                </p:cTn>
+                              </p:par>
+                              <p:par>
+                                <p:cTn id="19" presetID="1" presetClass="entr" presetSubtype="0" fill="hold" grpId="0" nodeType="withEffect">
+                                  <p:stCondLst>
+                                    <p:cond delay="0"/>
+                                  </p:stCondLst>
+                                  <p:childTnLst>
+                                    <p:set>
+                                      <p:cBhvr>
+                                        <p:cTn id="20" dur="1" fill="hold">
+                                          <p:stCondLst>
+                                            <p:cond delay="0"/>
+                                          </p:stCondLst>
+                                        </p:cTn>
+                                        <p:tgtEl>
+                                          <p:spTgt spid="12"/>
+                                        </p:tgtEl>
+                                        <p:attrNameLst>
+                                          <p:attrName>style.visibility</p:attrName>
+                                        </p:attrNameLst>
+                                      </p:cBhvr>
+                                      <p:to>
+                                        <p:strVal val="visible"/>
+                                      </p:to>
+                                    </p:set>
+                                  </p:childTnLst>
+                                </p:cTn>
+                              </p:par>
+                            </p:childTnLst>
+                          </p:cTn>
+                        </p:par>
+                      </p:childTnLst>
+                    </p:cTn>
+                  </p:par>
+                  <p:par>
+                    <p:cTn id="21" fill="hold">
+                      <p:stCondLst>
+                        <p:cond delay="indefinite"/>
+                      </p:stCondLst>
+                      <p:childTnLst>
+                        <p:par>
+                          <p:cTn id="22" fill="hold">
+                            <p:stCondLst>
+                              <p:cond delay="0"/>
+                            </p:stCondLst>
+                            <p:childTnLst>
+                              <p:par>
+                                <p:cTn id="23" presetID="1" presetClass="entr" presetSubtype="0" fill="hold" grpId="0" nodeType="clickEffect">
+                                  <p:stCondLst>
+                                    <p:cond delay="0"/>
+                                  </p:stCondLst>
+                                  <p:childTnLst>
+                                    <p:set>
+                                      <p:cBhvr>
+                                        <p:cTn id="24" dur="1" fill="hold">
+                                          <p:stCondLst>
+                                            <p:cond delay="0"/>
+                                          </p:stCondLst>
+                                        </p:cTn>
+                                        <p:tgtEl>
+                                          <p:spTgt spid="44"/>
+                                        </p:tgtEl>
+                                        <p:attrNameLst>
+                                          <p:attrName>style.visibility</p:attrName>
+                                        </p:attrNameLst>
+                                      </p:cBhvr>
+                                      <p:to>
+                                        <p:strVal val="visible"/>
+                                      </p:to>
+                                    </p:set>
+                                  </p:childTnLst>
+                                </p:cTn>
+                              </p:par>
+                              <p:par>
+                                <p:cTn id="25" presetID="1" presetClass="entr" presetSubtype="0" fill="hold" grpId="0" nodeType="withEffect">
+                                  <p:stCondLst>
+                                    <p:cond delay="0"/>
+                                  </p:stCondLst>
+                                  <p:childTnLst>
+                                    <p:set>
+                                      <p:cBhvr>
+                                        <p:cTn id="26" dur="1" fill="hold">
+                                          <p:stCondLst>
+                                            <p:cond delay="0"/>
+                                          </p:stCondLst>
+                                        </p:cTn>
+                                        <p:tgtEl>
+                                          <p:spTgt spid="42"/>
+                                        </p:tgtEl>
+                                        <p:attrNameLst>
+                                          <p:attrName>style.visibility</p:attrName>
+                                        </p:attrNameLst>
+                                      </p:cBhvr>
+                                      <p:to>
+                                        <p:strVal val="visible"/>
+                                      </p:to>
+                                    </p:set>
+                                  </p:childTnLst>
+                                </p:cTn>
+                              </p:par>
+                            </p:childTnLst>
+                          </p:cTn>
+                        </p:par>
+                      </p:childTnLst>
+                    </p:cTn>
+                  </p:par>
+                </p:childTnLst>
+              </p:cTn>
+              <p:prevCondLst>
+                <p:cond evt="onPrev" delay="0">
+                  <p:tgtEl>
+                    <p:sldTgt/>
+                  </p:tgtEl>
+                </p:cond>
+              </p:prevCondLst>
+              <p:nextCondLst>
+                <p:cond evt="onNext" delay="0">
+                  <p:tgtEl>
+                    <p:sldTgt/>
+                  </p:tgtEl>
+                </p:cond>
+              </p:nextCondLst>
+            </p:seq>
+          </p:childTnLst>
+        </p:cTn>
+      </p:par>
+    </p:tnLst>
+    <p:bldLst>
+      <p:bldP spid="12" grpId="0" animBg="1"/>
+      <p:bldP spid="16" grpId="0"/>
+      <p:bldP spid="30" grpId="0" animBg="1"/>
+      <p:bldP spid="34" grpId="0"/>
+      <p:bldP spid="36" grpId="0" animBg="1"/>
+      <p:bldP spid="40" grpId="0"/>
+      <p:bldP spid="42" grpId="0" animBg="1"/>
+      <p:bldP spid="44" grpId="0"/>
+    </p:bldLst>
+  </p:timing>
+</p:sld>
+</file>
+
 <file path=ppt/slides/slide3.xml><?xml version="1.0" encoding="utf-8"?>
 <p:sld xmlns:a="http://schemas.openxmlformats.org/drawingml/2006/main" xmlns:r="http://schemas.openxmlformats.org/officeDocument/2006/relationships" xmlns:p="http://schemas.openxmlformats.org/presentationml/2006/main">
   <p:cSld>
@@ -17999,6 +19258,78 @@
         <p:cNvPr id="1" name="">
           <a:extLst>
             <a:ext uri="{FF2B5EF4-FFF2-40B4-BE49-F238E27FC236}">
+              <a16:creationId xmlns:a16="http://schemas.microsoft.com/office/drawing/2014/main" id="{2C5B26B4-9624-18CB-4EEF-2495B13BE094}"/>
+            </a:ext>
+          </a:extLst>
+        </p:cNvPr>
+        <p:cNvGrpSpPr/>
+        <p:nvPr/>
+      </p:nvGrpSpPr>
+      <p:grpSpPr>
+        <a:xfrm>
+          <a:off x="0" y="0"/>
+          <a:ext cx="0" cy="0"/>
+          <a:chOff x="0" y="0"/>
+          <a:chExt cx="0" cy="0"/>
+        </a:xfrm>
+      </p:grpSpPr>
+      <p:pic>
+        <p:nvPicPr>
+          <p:cNvPr id="10" name="Picture 9">
+            <a:extLst>
+              <a:ext uri="{FF2B5EF4-FFF2-40B4-BE49-F238E27FC236}">
+                <a16:creationId xmlns:a16="http://schemas.microsoft.com/office/drawing/2014/main" id="{7C82ACC7-3339-3C71-9E5A-3AE37FCD669B}"/>
+              </a:ext>
+            </a:extLst>
+          </p:cNvPr>
+          <p:cNvPicPr>
+            <a:picLocks noChangeAspect="1"/>
+          </p:cNvPicPr>
+          <p:nvPr/>
+        </p:nvPicPr>
+        <p:blipFill>
+          <a:blip r:embed="rId3">
+            <a:extLst>
+              <a:ext uri="{28A0092B-C50C-407E-A947-70E740481C1C}">
+                <a14:useLocalDpi xmlns:a14="http://schemas.microsoft.com/office/drawing/2010/main" val="0"/>
+              </a:ext>
+            </a:extLst>
+          </a:blip>
+          <a:stretch>
+            <a:fillRect/>
+          </a:stretch>
+        </p:blipFill>
+        <p:spPr>
+          <a:xfrm>
+            <a:off x="575870" y="602166"/>
+            <a:ext cx="11040259" cy="5970218"/>
+          </a:xfrm>
+          <a:prstGeom prst="rect">
+            <a:avLst/>
+          </a:prstGeom>
+        </p:spPr>
+      </p:pic>
+    </p:spTree>
+    <p:extLst>
+      <p:ext uri="{BB962C8B-B14F-4D97-AF65-F5344CB8AC3E}">
+        <p14:creationId xmlns:p14="http://schemas.microsoft.com/office/powerpoint/2010/main" val="302639675"/>
+      </p:ext>
+    </p:extLst>
+  </p:cSld>
+  <p:clrMapOvr>
+    <a:masterClrMapping/>
+  </p:clrMapOvr>
+</p:sld>
+</file>
+
+<file path=ppt/slides/slide8.xml><?xml version="1.0" encoding="utf-8"?>
+<p:sld xmlns:a="http://schemas.openxmlformats.org/drawingml/2006/main" xmlns:r="http://schemas.openxmlformats.org/officeDocument/2006/relationships" xmlns:p="http://schemas.openxmlformats.org/presentationml/2006/main">
+  <p:cSld>
+    <p:spTree>
+      <p:nvGrpSpPr>
+        <p:cNvPr id="1" name="">
+          <a:extLst>
+            <a:ext uri="{FF2B5EF4-FFF2-40B4-BE49-F238E27FC236}">
               <a16:creationId xmlns:a16="http://schemas.microsoft.com/office/drawing/2014/main" id="{4521C9A4-8753-A0BD-7BE9-1FF42D600FD3}"/>
             </a:ext>
           </a:extLst>
@@ -18377,7 +19708,7 @@
             </a:r>
             <a:r>
               <a:rPr lang="en-US" dirty="0"/>
-              <a:t>"</a:t>
+              <a:t>“,</a:t>
             </a:r>
           </a:p>
           <a:p>
@@ -18389,7 +19720,7 @@
           <a:p>
             <a:r>
               <a:rPr lang="en-US" dirty="0"/>
-              <a:t>         upper="number", # upper is the correlation coefficient)</a:t>
+              <a:t>         upper="number“) # upper is the correlation coefficient</a:t>
             </a:r>
           </a:p>
         </p:txBody>
@@ -18407,7 +19738,7 @@
 </p:sld>
 </file>
 
-<file path=ppt/slides/slide8.xml><?xml version="1.0" encoding="utf-8"?>
+<file path=ppt/slides/slide9.xml><?xml version="1.0" encoding="utf-8"?>
 <p:sld xmlns:a="http://schemas.openxmlformats.org/drawingml/2006/main" xmlns:r="http://schemas.openxmlformats.org/officeDocument/2006/relationships" xmlns:p="http://schemas.openxmlformats.org/presentationml/2006/main">
   <p:cSld>
     <p:spTree>
@@ -18594,306 +19925,6 @@
     <p:extLst>
       <p:ext uri="{BB962C8B-B14F-4D97-AF65-F5344CB8AC3E}">
         <p14:creationId xmlns:p14="http://schemas.microsoft.com/office/powerpoint/2010/main" val="541490919"/>
-      </p:ext>
-    </p:extLst>
-  </p:cSld>
-  <p:clrMapOvr>
-    <a:masterClrMapping/>
-  </p:clrMapOvr>
-</p:sld>
-</file>
-
-<file path=ppt/slides/slide9.xml><?xml version="1.0" encoding="utf-8"?>
-<p:sld xmlns:a="http://schemas.openxmlformats.org/drawingml/2006/main" xmlns:r="http://schemas.openxmlformats.org/officeDocument/2006/relationships" xmlns:p="http://schemas.openxmlformats.org/presentationml/2006/main">
-  <p:cSld>
-    <p:spTree>
-      <p:nvGrpSpPr>
-        <p:cNvPr id="1" name="">
-          <a:extLst>
-            <a:ext uri="{FF2B5EF4-FFF2-40B4-BE49-F238E27FC236}">
-              <a16:creationId xmlns:a16="http://schemas.microsoft.com/office/drawing/2014/main" id="{4C175A8F-A494-F55F-88CD-5AC660F53112}"/>
-            </a:ext>
-          </a:extLst>
-        </p:cNvPr>
-        <p:cNvGrpSpPr/>
-        <p:nvPr/>
-      </p:nvGrpSpPr>
-      <p:grpSpPr>
-        <a:xfrm>
-          <a:off x="0" y="0"/>
-          <a:ext cx="0" cy="0"/>
-          <a:chOff x="0" y="0"/>
-          <a:chExt cx="0" cy="0"/>
-        </a:xfrm>
-      </p:grpSpPr>
-      <p:pic>
-        <p:nvPicPr>
-          <p:cNvPr id="5" name="Picture 4">
-            <a:extLst>
-              <a:ext uri="{FF2B5EF4-FFF2-40B4-BE49-F238E27FC236}">
-                <a16:creationId xmlns:a16="http://schemas.microsoft.com/office/drawing/2014/main" id="{75E06F87-964B-3BAA-027D-849EF41C1834}"/>
-              </a:ext>
-            </a:extLst>
-          </p:cNvPr>
-          <p:cNvPicPr>
-            <a:picLocks noChangeAspect="1"/>
-          </p:cNvPicPr>
-          <p:nvPr/>
-        </p:nvPicPr>
-        <p:blipFill>
-          <a:blip r:embed="rId3"/>
-          <a:stretch>
-            <a:fillRect/>
-          </a:stretch>
-        </p:blipFill>
-        <p:spPr>
-          <a:xfrm>
-            <a:off x="4660362" y="0"/>
-            <a:ext cx="7531638" cy="6858000"/>
-          </a:xfrm>
-          <a:prstGeom prst="rect">
-            <a:avLst/>
-          </a:prstGeom>
-        </p:spPr>
-      </p:pic>
-      <p:sp>
-        <p:nvSpPr>
-          <p:cNvPr id="2" name="Title 1">
-            <a:extLst>
-              <a:ext uri="{FF2B5EF4-FFF2-40B4-BE49-F238E27FC236}">
-                <a16:creationId xmlns:a16="http://schemas.microsoft.com/office/drawing/2014/main" id="{FF9F883F-517D-295B-67EE-5C1465D43836}"/>
-              </a:ext>
-            </a:extLst>
-          </p:cNvPr>
-          <p:cNvSpPr>
-            <a:spLocks noGrp="1"/>
-          </p:cNvSpPr>
-          <p:nvPr>
-            <p:ph type="title"/>
-          </p:nvPr>
-        </p:nvSpPr>
-        <p:spPr/>
-        <p:txBody>
-          <a:bodyPr/>
-          <a:lstStyle/>
-          <a:p>
-            <a:r>
-              <a:rPr lang="en-US" dirty="0">
-                <a:latin typeface="Aharoni" panose="02010803020104030203" pitchFamily="2" charset="-79"/>
-                <a:cs typeface="Aharoni" panose="02010803020104030203" pitchFamily="2" charset="-79"/>
-              </a:rPr>
-              <a:t>Correlation plot</a:t>
-            </a:r>
-          </a:p>
-        </p:txBody>
-      </p:sp>
-      <p:sp>
-        <p:nvSpPr>
-          <p:cNvPr id="7" name="Content Placeholder 2">
-            <a:extLst>
-              <a:ext uri="{FF2B5EF4-FFF2-40B4-BE49-F238E27FC236}">
-                <a16:creationId xmlns:a16="http://schemas.microsoft.com/office/drawing/2014/main" id="{0A3ED50B-3B9A-BC16-ACA4-CF9DBD856176}"/>
-              </a:ext>
-            </a:extLst>
-          </p:cNvPr>
-          <p:cNvSpPr>
-            <a:spLocks noGrp="1"/>
-          </p:cNvSpPr>
-          <p:nvPr>
-            <p:ph idx="1"/>
-          </p:nvPr>
-        </p:nvSpPr>
-        <p:spPr>
-          <a:xfrm>
-            <a:off x="637478" y="1825625"/>
-            <a:ext cx="4492083" cy="4809351"/>
-          </a:xfrm>
-        </p:spPr>
-        <p:txBody>
-          <a:bodyPr>
-            <a:normAutofit/>
-          </a:bodyPr>
-          <a:lstStyle/>
-          <a:p>
-            <a:r>
-              <a:rPr lang="en-US" dirty="0">
-                <a:latin typeface="Abadi" panose="020B0604020104020204" pitchFamily="34" charset="0"/>
-              </a:rPr>
-              <a:t>Read csv into R</a:t>
-            </a:r>
-          </a:p>
-          <a:p>
-            <a:r>
-              <a:rPr lang="en-US" dirty="0">
-                <a:latin typeface="Abadi" panose="020B0604020104020204" pitchFamily="34" charset="0"/>
-              </a:rPr>
-              <a:t>Load </a:t>
-            </a:r>
-            <a:r>
-              <a:rPr lang="en-US" dirty="0" err="1">
-                <a:latin typeface="Abadi" panose="020B0604020104020204" pitchFamily="34" charset="0"/>
-              </a:rPr>
-              <a:t>tidyverse</a:t>
-            </a:r>
-            <a:r>
-              <a:rPr lang="en-US" dirty="0">
-                <a:latin typeface="Abadi" panose="020B0604020104020204" pitchFamily="34" charset="0"/>
-              </a:rPr>
-              <a:t> and </a:t>
-            </a:r>
-            <a:r>
-              <a:rPr lang="en-US" dirty="0" err="1">
-                <a:latin typeface="Abadi" panose="020B0604020104020204" pitchFamily="34" charset="0"/>
-              </a:rPr>
-              <a:t>corrplot</a:t>
-            </a:r>
-            <a:endParaRPr lang="en-US" dirty="0">
-              <a:latin typeface="Abadi" panose="020B0604020104020204" pitchFamily="34" charset="0"/>
-            </a:endParaRPr>
-          </a:p>
-          <a:p>
-            <a:r>
-              <a:rPr lang="en-US" dirty="0">
-                <a:latin typeface="Abadi" panose="020B0604020104020204" pitchFamily="34" charset="0"/>
-              </a:rPr>
-              <a:t>Make a correlation matrix</a:t>
-            </a:r>
-          </a:p>
-          <a:p>
-            <a:r>
-              <a:rPr lang="en-US" dirty="0">
-                <a:latin typeface="Abadi" panose="020B0604020104020204" pitchFamily="34" charset="0"/>
-              </a:rPr>
-              <a:t>Plot with </a:t>
-            </a:r>
-            <a:r>
-              <a:rPr lang="en-US" dirty="0" err="1">
-                <a:latin typeface="Abadi" panose="020B0604020104020204" pitchFamily="34" charset="0"/>
-              </a:rPr>
-              <a:t>corrplot</a:t>
-            </a:r>
-            <a:endParaRPr lang="en-US" dirty="0">
-              <a:latin typeface="Abadi" panose="020B0604020104020204" pitchFamily="34" charset="0"/>
-            </a:endParaRPr>
-          </a:p>
-          <a:p>
-            <a:r>
-              <a:rPr lang="en-US" dirty="0">
-                <a:latin typeface="Abadi" panose="020B0604020104020204" pitchFamily="34" charset="0"/>
-              </a:rPr>
-              <a:t>Plot a more complex version</a:t>
-            </a:r>
-          </a:p>
-        </p:txBody>
-      </p:sp>
-      <p:sp>
-        <p:nvSpPr>
-          <p:cNvPr id="6" name="Oval 5">
-            <a:extLst>
-              <a:ext uri="{FF2B5EF4-FFF2-40B4-BE49-F238E27FC236}">
-                <a16:creationId xmlns:a16="http://schemas.microsoft.com/office/drawing/2014/main" id="{DA5A1DDB-128F-9927-8397-C9B69B8890C8}"/>
-              </a:ext>
-            </a:extLst>
-          </p:cNvPr>
-          <p:cNvSpPr/>
-          <p:nvPr/>
-        </p:nvSpPr>
-        <p:spPr>
-          <a:xfrm>
-            <a:off x="8697951" y="1825625"/>
-            <a:ext cx="724829" cy="794912"/>
-          </a:xfrm>
-          <a:prstGeom prst="ellipse">
-            <a:avLst/>
-          </a:prstGeom>
-          <a:noFill/>
-          <a:ln w="57150">
-            <a:solidFill>
-              <a:srgbClr val="FF0000"/>
-            </a:solidFill>
-          </a:ln>
-        </p:spPr>
-        <p:style>
-          <a:lnRef idx="2">
-            <a:schemeClr val="accent1">
-              <a:shade val="15000"/>
-            </a:schemeClr>
-          </a:lnRef>
-          <a:fillRef idx="1">
-            <a:schemeClr val="accent1"/>
-          </a:fillRef>
-          <a:effectRef idx="0">
-            <a:schemeClr val="accent1"/>
-          </a:effectRef>
-          <a:fontRef idx="minor">
-            <a:schemeClr val="lt1"/>
-          </a:fontRef>
-        </p:style>
-        <p:txBody>
-          <a:bodyPr rtlCol="0" anchor="ctr"/>
-          <a:lstStyle/>
-          <a:p>
-            <a:pPr algn="ctr"/>
-            <a:endParaRPr lang="en-US"/>
-          </a:p>
-        </p:txBody>
-      </p:sp>
-      <p:sp>
-        <p:nvSpPr>
-          <p:cNvPr id="9" name="Oval 8">
-            <a:extLst>
-              <a:ext uri="{FF2B5EF4-FFF2-40B4-BE49-F238E27FC236}">
-                <a16:creationId xmlns:a16="http://schemas.microsoft.com/office/drawing/2014/main" id="{C7CA6624-9061-3A8E-D066-156948F623CC}"/>
-              </a:ext>
-            </a:extLst>
-          </p:cNvPr>
-          <p:cNvSpPr/>
-          <p:nvPr/>
-        </p:nvSpPr>
-        <p:spPr>
-          <a:xfrm>
-            <a:off x="6607096" y="3928927"/>
-            <a:ext cx="724829" cy="794912"/>
-          </a:xfrm>
-          <a:prstGeom prst="ellipse">
-            <a:avLst/>
-          </a:prstGeom>
-          <a:noFill/>
-          <a:ln w="57150">
-            <a:solidFill>
-              <a:srgbClr val="FF0000"/>
-            </a:solidFill>
-          </a:ln>
-        </p:spPr>
-        <p:style>
-          <a:lnRef idx="2">
-            <a:schemeClr val="accent1">
-              <a:shade val="15000"/>
-            </a:schemeClr>
-          </a:lnRef>
-          <a:fillRef idx="1">
-            <a:schemeClr val="accent1"/>
-          </a:fillRef>
-          <a:effectRef idx="0">
-            <a:schemeClr val="accent1"/>
-          </a:effectRef>
-          <a:fontRef idx="minor">
-            <a:schemeClr val="lt1"/>
-          </a:fontRef>
-        </p:style>
-        <p:txBody>
-          <a:bodyPr rtlCol="0" anchor="ctr"/>
-          <a:lstStyle/>
-          <a:p>
-            <a:pPr algn="ctr"/>
-            <a:endParaRPr lang="en-US"/>
-          </a:p>
-        </p:txBody>
-      </p:sp>
-    </p:spTree>
-    <p:extLst>
-      <p:ext uri="{BB962C8B-B14F-4D97-AF65-F5344CB8AC3E}">
-        <p14:creationId xmlns:p14="http://schemas.microsoft.com/office/powerpoint/2010/main" val="4084528048"/>
       </p:ext>
     </p:extLst>
   </p:cSld>

--- a/Part6_SummaryStatistics/Part6_SummaryStats.pptx
+++ b/Part6_SummaryStatistics/Part6_SummaryStats.pptx
@@ -16418,7 +16418,7 @@
         <p:spPr>
           <a:xfrm>
             <a:off x="191430" y="0"/>
-            <a:ext cx="11809140" cy="7017306"/>
+            <a:ext cx="11809140" cy="7094250"/>
           </a:xfrm>
           <a:prstGeom prst="rect">
             <a:avLst/>
@@ -16531,7 +16531,17 @@
             </a:r>
             <a:r>
               <a:rPr lang="en-US" sz="1750" dirty="0"/>
-              <a:t>, Island!="Outgroup") # remove outgroup</a:t>
+              <a:t>=","), # read in the CSV</a:t>
+            </a:r>
+          </a:p>
+          <a:p>
+            <a:r>
+              <a:rPr lang="en-US" sz="1750" dirty="0"/>
+              <a:t>	Island!="Outgroup") # </a:t>
+            </a:r>
+            <a:r>
+              <a:rPr lang="en-US" sz="1750"/>
+              <a:t>remove outgroup</a:t>
             </a:r>
           </a:p>
           <a:p>
